--- a/Smart_WMS_Agent_기획요약.pptx
+++ b/Smart_WMS_Agent_기획요약.pptx
@@ -23,6 +23,10 @@
     <p:sldId id="271" r:id="rId17"/>
     <p:sldId id="272" r:id="rId18"/>
     <p:sldId id="273" r:id="rId19"/>
+    <p:sldId id="274" r:id="rId25"/>
+    <p:sldId id="275" r:id="rId26"/>
+    <p:sldId id="276" r:id="rId27"/>
+    <p:sldId id="277" r:id="rId28"/>
   </p:sldIdLst>
   <p:notesMasterIdLst>
     <p:notesMasterId r:id="rId20"/>
@@ -4034,7 +4038,7 @@
                 <a:ea typeface="Malgun Gothic" pitchFamily="34" charset="-122"/>
                 <a:cs typeface="Malgun Gothic" pitchFamily="34" charset="-120"/>
               </a:rPr>
-              <a:t>평가 하네스  </a:t>
+              <a:t xml:space="preserve">평가 하네스  </a:t>
             </a:r>
             <a:pPr indent="0" marL="0">
               <a:buNone/>
@@ -6315,7 +6319,7 @@
                 <a:ea typeface="Courier New" pitchFamily="34" charset="-122"/>
                 <a:cs typeface="Courier New" pitchFamily="34" charset="-120"/>
               </a:rPr>
-              <a:t>  q, retries = query, 0</a:t>
+              <a:t xml:space="preserve">  q, retries = query, 0</a:t>
             </a:r>
             <a:endParaRPr lang="en-US" sz="830" dirty="0"/>
           </a:p>
@@ -6335,7 +6339,7 @@
                 <a:ea typeface="Courier New" pitchFamily="34" charset="-122"/>
                 <a:cs typeface="Courier New" pitchFamily="34" charset="-120"/>
               </a:rPr>
-              <a:t>  while True:</a:t>
+              <a:t xml:space="preserve">  while True:</a:t>
             </a:r>
             <a:endParaRPr lang="en-US" sz="830" dirty="0"/>
           </a:p>
@@ -6355,7 +6359,7 @@
                 <a:ea typeface="Courier New" pitchFamily="34" charset="-122"/>
                 <a:cs typeface="Courier New" pitchFamily="34" charset="-120"/>
               </a:rPr>
-              <a:t>    cands  = search(q, k, intent)    # FAISS</a:t>
+              <a:t xml:space="preserve">    cands  = search(q, k, intent)    # FAISS</a:t>
             </a:r>
             <a:endParaRPr lang="en-US" sz="830" dirty="0"/>
           </a:p>
@@ -6375,7 +6379,7 @@
                 <a:ea typeface="Courier New" pitchFamily="34" charset="-122"/>
                 <a:cs typeface="Courier New" pitchFamily="34" charset="-120"/>
               </a:rPr>
-              <a:t>    ranked = prism_rerank(query, cands)</a:t>
+              <a:t xml:space="preserve">    ranked = prism_rerank(query, cands)</a:t>
             </a:r>
             <a:endParaRPr lang="en-US" sz="830" dirty="0"/>
           </a:p>
@@ -6395,7 +6399,7 @@
                 <a:ea typeface="Courier New" pitchFamily="34" charset="-122"/>
                 <a:cs typeface="Courier New" pitchFamily="34" charset="-120"/>
               </a:rPr>
-              <a:t>    judge  = sufficient_context(query, ranked)</a:t>
+              <a:t xml:space="preserve">    judge  = sufficient_context(query, ranked)</a:t>
             </a:r>
             <a:endParaRPr lang="en-US" sz="830" dirty="0"/>
           </a:p>
@@ -6415,7 +6419,7 @@
                 <a:ea typeface="Courier New" pitchFamily="34" charset="-122"/>
                 <a:cs typeface="Courier New" pitchFamily="34" charset="-120"/>
               </a:rPr>
-              <a:t>    if judge["answerable"] or retries&gt;=2:</a:t>
+              <a:t xml:space="preserve">    if judge["answerable"] or retries&gt;=2:</a:t>
             </a:r>
             <a:endParaRPr lang="en-US" sz="830" dirty="0"/>
           </a:p>
@@ -6435,7 +6439,7 @@
                 <a:ea typeface="Courier New" pitchFamily="34" charset="-122"/>
                 <a:cs typeface="Courier New" pitchFamily="34" charset="-120"/>
               </a:rPr>
-              <a:t>      break</a:t>
+              <a:t xml:space="preserve">      break</a:t>
             </a:r>
             <a:endParaRPr lang="en-US" sz="830" dirty="0"/>
           </a:p>
@@ -6455,7 +6459,7 @@
                 <a:ea typeface="Courier New" pitchFamily="34" charset="-122"/>
                 <a:cs typeface="Courier New" pitchFamily="34" charset="-120"/>
               </a:rPr>
-              <a:t>    # 부족한 근거유형을 질의에 보강 후 재검색</a:t>
+              <a:t xml:space="preserve">    # 부족한 근거유형을 질의에 보강 후 재검색</a:t>
             </a:r>
             <a:endParaRPr lang="en-US" sz="830" dirty="0"/>
           </a:p>
@@ -6475,7 +6479,7 @@
                 <a:ea typeface="Courier New" pitchFamily="34" charset="-122"/>
                 <a:cs typeface="Courier New" pitchFamily="34" charset="-120"/>
               </a:rPr>
-              <a:t>    q = f"{query} {missing}"</a:t>
+              <a:t xml:space="preserve">    q = f"{query} {missing}"</a:t>
             </a:r>
             <a:endParaRPr lang="en-US" sz="830" dirty="0"/>
           </a:p>
@@ -6495,7 +6499,7 @@
                 <a:ea typeface="Courier New" pitchFamily="34" charset="-122"/>
                 <a:cs typeface="Courier New" pitchFamily="34" charset="-120"/>
               </a:rPr>
-              <a:t>    retries += 1</a:t>
+              <a:t xml:space="preserve">    retries += 1</a:t>
             </a:r>
             <a:endParaRPr lang="en-US" sz="830" dirty="0"/>
           </a:p>
@@ -6515,7 +6519,7 @@
                 <a:ea typeface="Courier New" pitchFamily="34" charset="-122"/>
                 <a:cs typeface="Courier New" pitchFamily="34" charset="-120"/>
               </a:rPr>
-              <a:t>  # 충분: 근거 반환 / 부족: abstain</a:t>
+              <a:t xml:space="preserve">  # 충분: 근거 반환 / 부족: abstain</a:t>
             </a:r>
             <a:endParaRPr lang="en-US" sz="830" dirty="0"/>
           </a:p>
@@ -6638,7 +6642,7 @@
                 <a:ea typeface="Courier New" pitchFamily="34" charset="-122"/>
                 <a:cs typeface="Courier New" pitchFamily="34" charset="-120"/>
               </a:rPr>
-              <a:t>  "inventory_risk": _h_inventory_risk,</a:t>
+              <a:t xml:space="preserve">  "inventory_risk": _h_inventory_risk,</a:t>
             </a:r>
             <a:endParaRPr lang="en-US" sz="830" dirty="0"/>
           </a:p>
@@ -6658,7 +6662,7 @@
                 <a:ea typeface="Courier New" pitchFamily="34" charset="-122"/>
                 <a:cs typeface="Courier New" pitchFamily="34" charset="-120"/>
               </a:rPr>
-              <a:t>  "stocking_recommendation": _h_stocking, ...}</a:t>
+              <a:t xml:space="preserve">  "stocking_recommendation": _h_stocking, ...}</a:t>
             </a:r>
             <a:endParaRPr lang="en-US" sz="830" dirty="0"/>
           </a:p>
@@ -6698,7 +6702,7 @@
                 <a:ea typeface="Courier New" pitchFamily="34" charset="-122"/>
                 <a:cs typeface="Courier New" pitchFamily="34" charset="-120"/>
               </a:rPr>
-              <a:t>  h = _HANDLERS[state["intent"]]</a:t>
+              <a:t xml:space="preserve">  h = _HANDLERS[state["intent"]]</a:t>
             </a:r>
             <a:endParaRPr lang="en-US" sz="830" dirty="0"/>
           </a:p>
@@ -6718,7 +6722,7 @@
                 <a:ea typeface="Courier New" pitchFamily="34" charset="-122"/>
                 <a:cs typeface="Courier New" pitchFamily="34" charset="-120"/>
               </a:rPr>
-              <a:t>  return {"tool_results": h(state["params"])}</a:t>
+              <a:t xml:space="preserve">  return {"tool_results": h(state["params"])}</a:t>
             </a:r>
             <a:endParaRPr lang="en-US" sz="830" dirty="0"/>
           </a:p>
@@ -6841,7 +6845,7 @@
                 <a:ea typeface="Courier New" pitchFamily="34" charset="-122"/>
                 <a:cs typeface="Courier New" pitchFamily="34" charset="-120"/>
               </a:rPr>
-              <a:t>  "stocking_recommendation", "inventory_risk"...}</a:t>
+              <a:t xml:space="preserve">  "stocking_recommendation", "inventory_risk"...}</a:t>
             </a:r>
             <a:endParaRPr lang="en-US" sz="830" dirty="0"/>
           </a:p>
@@ -6881,7 +6885,7 @@
                 <a:ea typeface="Courier New" pitchFamily="34" charset="-122"/>
                 <a:cs typeface="Courier New" pitchFamily="34" charset="-120"/>
               </a:rPr>
-              <a:t>  # 단순 조회는 검색 생략(비용·지연 ↓)</a:t>
+              <a:t xml:space="preserve">  # 단순 조회는 검색 생략(비용·지연 ↓)</a:t>
             </a:r>
             <a:endParaRPr lang="en-US" sz="830" dirty="0"/>
           </a:p>
@@ -6901,7 +6905,7 @@
                 <a:ea typeface="Courier New" pitchFamily="34" charset="-122"/>
                 <a:cs typeface="Courier New" pitchFamily="34" charset="-120"/>
               </a:rPr>
-              <a:t>  return {"rag_required":</a:t>
+              <a:t xml:space="preserve">  return {"rag_required":</a:t>
             </a:r>
             <a:endParaRPr lang="en-US" sz="830" dirty="0"/>
           </a:p>
@@ -6921,7 +6925,7 @@
                 <a:ea typeface="Courier New" pitchFamily="34" charset="-122"/>
                 <a:cs typeface="Courier New" pitchFamily="34" charset="-120"/>
               </a:rPr>
-              <a:t>          state["intent"] in RAG_INTENTS}</a:t>
+              <a:t xml:space="preserve">          state["intent"] in RAG_INTENTS}</a:t>
             </a:r>
             <a:endParaRPr lang="en-US" sz="830" dirty="0"/>
           </a:p>
@@ -7513,7 +7517,7 @@
                 <a:ea typeface="Malgun Gothic" pitchFamily="34" charset="-122"/>
                 <a:cs typeface="Malgun Gothic" pitchFamily="34" charset="-120"/>
               </a:rPr>
-              <a:t>ALR </a:t>
+              <a:t xml:space="preserve">ALR </a:t>
             </a:r>
             <a:pPr indent="0" marL="0">
               <a:lnSpc>
@@ -7530,7 +7534,7 @@
                 <a:ea typeface="Malgun Gothic" pitchFamily="34" charset="-122"/>
                 <a:cs typeface="Malgun Gothic" pitchFamily="34" charset="-120"/>
               </a:rPr>
-              <a:t>근거 구조·사전 라우팅      </a:t>
+              <a:t xml:space="preserve">근거 구조·사전 라우팅      </a:t>
             </a:r>
             <a:pPr indent="0" marL="0">
               <a:lnSpc>
@@ -7547,7 +7551,7 @@
                 <a:ea typeface="Malgun Gothic" pitchFamily="34" charset="-122"/>
                 <a:cs typeface="Malgun Gothic" pitchFamily="34" charset="-120"/>
               </a:rPr>
-              <a:t>PRISM </a:t>
+              <a:t xml:space="preserve">PRISM </a:t>
             </a:r>
             <a:pPr indent="0" marL="0">
               <a:lnSpc>
@@ -7564,7 +7568,7 @@
                 <a:ea typeface="Malgun Gothic" pitchFamily="34" charset="-122"/>
                 <a:cs typeface="Malgun Gothic" pitchFamily="34" charset="-120"/>
               </a:rPr>
-              <a:t>설명용 근거 추출      </a:t>
+              <a:t xml:space="preserve">설명용 근거 추출      </a:t>
             </a:r>
             <a:pPr indent="0" marL="0">
               <a:lnSpc>
@@ -7581,7 +7585,7 @@
                 <a:ea typeface="Malgun Gothic" pitchFamily="34" charset="-122"/>
                 <a:cs typeface="Malgun Gothic" pitchFamily="34" charset="-120"/>
               </a:rPr>
-              <a:t>Sufficient </a:t>
+              <a:t xml:space="preserve">Sufficient </a:t>
             </a:r>
             <a:pPr indent="0" marL="0">
               <a:lnSpc>
@@ -7828,7 +7832,7 @@
                 <a:ea typeface="Malgun Gothic" pitchFamily="34" charset="-122"/>
                 <a:cs typeface="Malgun Gothic" pitchFamily="34" charset="-120"/>
               </a:rPr>
-              <a:t>질문 입력 </a:t>
+              <a:t xml:space="preserve">질문 입력 </a:t>
             </a:r>
             <a:pPr algn="ctr" indent="0" marL="0">
               <a:buNone/>
@@ -7842,7 +7846,7 @@
                 <a:ea typeface="Malgun Gothic" pitchFamily="34" charset="-122"/>
                 <a:cs typeface="Malgun Gothic" pitchFamily="34" charset="-120"/>
               </a:rPr>
-              <a:t>→  </a:t>
+              <a:t xml:space="preserve">→  </a:t>
             </a:r>
             <a:pPr algn="ctr" indent="0" marL="0">
               <a:buNone/>
@@ -7856,7 +7860,7 @@
                 <a:ea typeface="Malgun Gothic" pitchFamily="34" charset="-122"/>
                 <a:cs typeface="Malgun Gothic" pitchFamily="34" charset="-120"/>
               </a:rPr>
-              <a:t>ALR </a:t>
+              <a:t xml:space="preserve">ALR </a:t>
             </a:r>
             <a:pPr algn="ctr" indent="0" marL="0">
               <a:buNone/>
@@ -7870,7 +7874,7 @@
                 <a:ea typeface="Malgun Gothic" pitchFamily="34" charset="-122"/>
                 <a:cs typeface="Malgun Gothic" pitchFamily="34" charset="-120"/>
               </a:rPr>
-              <a:t>→  Retrieval  →  </a:t>
+              <a:t xml:space="preserve">→  Retrieval  →  </a:t>
             </a:r>
             <a:pPr algn="ctr" indent="0" marL="0">
               <a:buNone/>
@@ -7884,7 +7888,7 @@
                 <a:ea typeface="Malgun Gothic" pitchFamily="34" charset="-122"/>
                 <a:cs typeface="Malgun Gothic" pitchFamily="34" charset="-120"/>
               </a:rPr>
-              <a:t>PRISM </a:t>
+              <a:t xml:space="preserve">PRISM </a:t>
             </a:r>
             <a:pPr algn="ctr" indent="0" marL="0">
               <a:buNone/>
@@ -7898,7 +7902,7 @@
                 <a:ea typeface="Malgun Gothic" pitchFamily="34" charset="-122"/>
                 <a:cs typeface="Malgun Gothic" pitchFamily="34" charset="-120"/>
               </a:rPr>
-              <a:t>→  </a:t>
+              <a:t xml:space="preserve">→  </a:t>
             </a:r>
             <a:pPr algn="ctr" indent="0" marL="0">
               <a:buNone/>
@@ -7912,7 +7916,7 @@
                 <a:ea typeface="Malgun Gothic" pitchFamily="34" charset="-122"/>
                 <a:cs typeface="Malgun Gothic" pitchFamily="34" charset="-120"/>
               </a:rPr>
-              <a:t>Sufficient Context </a:t>
+              <a:t xml:space="preserve">Sufficient Context </a:t>
             </a:r>
             <a:pPr algn="ctr" indent="0" marL="0">
               <a:buNone/>
@@ -7926,7 +7930,7 @@
                 <a:ea typeface="Malgun Gothic" pitchFamily="34" charset="-122"/>
                 <a:cs typeface="Malgun Gothic" pitchFamily="34" charset="-120"/>
               </a:rPr>
-              <a:t>→  </a:t>
+              <a:t xml:space="preserve">→  </a:t>
             </a:r>
             <a:pPr algn="ctr" indent="0" marL="0">
               <a:buNone/>
@@ -8050,7 +8054,7 @@
                 <a:ea typeface="Malgun Gothic" pitchFamily="34" charset="-122"/>
                 <a:cs typeface="Malgun Gothic" pitchFamily="34" charset="-120"/>
               </a:rPr>
-              <a:t>무엇  </a:t>
+              <a:t xml:space="preserve">무엇  </a:t>
             </a:r>
             <a:pPr indent="0" marL="0">
               <a:lnSpc>
@@ -8096,7 +8100,7 @@
                 <a:ea typeface="Malgun Gothic" pitchFamily="34" charset="-122"/>
                 <a:cs typeface="Malgun Gothic" pitchFamily="34" charset="-120"/>
               </a:rPr>
-              <a:t>강점  </a:t>
+              <a:t xml:space="preserve">강점  </a:t>
             </a:r>
             <a:pPr indent="0" marL="0">
               <a:lnSpc>
@@ -8142,7 +8146,7 @@
                 <a:ea typeface="Malgun Gothic" pitchFamily="34" charset="-122"/>
                 <a:cs typeface="Malgun Gothic" pitchFamily="34" charset="-120"/>
               </a:rPr>
-              <a:t>역할  </a:t>
+              <a:t xml:space="preserve">역할  </a:t>
             </a:r>
             <a:pPr indent="0" marL="0">
               <a:lnSpc>
@@ -8269,7 +8273,7 @@
                 <a:ea typeface="Malgun Gothic" pitchFamily="34" charset="-122"/>
                 <a:cs typeface="Malgun Gothic" pitchFamily="34" charset="-120"/>
               </a:rPr>
-              <a:t>무엇  </a:t>
+              <a:t xml:space="preserve">무엇  </a:t>
             </a:r>
             <a:pPr indent="0" marL="0">
               <a:lnSpc>
@@ -8315,7 +8319,7 @@
                 <a:ea typeface="Malgun Gothic" pitchFamily="34" charset="-122"/>
                 <a:cs typeface="Malgun Gothic" pitchFamily="34" charset="-120"/>
               </a:rPr>
-              <a:t>강점  </a:t>
+              <a:t xml:space="preserve">강점  </a:t>
             </a:r>
             <a:pPr indent="0" marL="0">
               <a:lnSpc>
@@ -8361,7 +8365,7 @@
                 <a:ea typeface="Malgun Gothic" pitchFamily="34" charset="-122"/>
                 <a:cs typeface="Malgun Gothic" pitchFamily="34" charset="-120"/>
               </a:rPr>
-              <a:t>역할  </a:t>
+              <a:t xml:space="preserve">역할  </a:t>
             </a:r>
             <a:pPr indent="0" marL="0">
               <a:lnSpc>
@@ -8488,7 +8492,7 @@
                 <a:ea typeface="Malgun Gothic" pitchFamily="34" charset="-122"/>
                 <a:cs typeface="Malgun Gothic" pitchFamily="34" charset="-120"/>
               </a:rPr>
-              <a:t>무엇  </a:t>
+              <a:t xml:space="preserve">무엇  </a:t>
             </a:r>
             <a:pPr indent="0" marL="0">
               <a:lnSpc>
@@ -8534,7 +8538,7 @@
                 <a:ea typeface="Malgun Gothic" pitchFamily="34" charset="-122"/>
                 <a:cs typeface="Malgun Gothic" pitchFamily="34" charset="-120"/>
               </a:rPr>
-              <a:t>강점  </a:t>
+              <a:t xml:space="preserve">강점  </a:t>
             </a:r>
             <a:pPr indent="0" marL="0">
               <a:lnSpc>
@@ -8580,7 +8584,7 @@
                 <a:ea typeface="Malgun Gothic" pitchFamily="34" charset="-122"/>
                 <a:cs typeface="Malgun Gothic" pitchFamily="34" charset="-120"/>
               </a:rPr>
-              <a:t>역할  </a:t>
+              <a:t xml:space="preserve">역할  </a:t>
             </a:r>
             <a:pPr indent="0" marL="0">
               <a:lnSpc>
@@ -8661,7 +8665,7 @@
                 <a:ea typeface="Malgun Gothic" pitchFamily="34" charset="-122"/>
                 <a:cs typeface="Malgun Gothic" pitchFamily="34" charset="-120"/>
               </a:rPr>
-              <a:t>결합  </a:t>
+              <a:t xml:space="preserve">결합  </a:t>
             </a:r>
             <a:pPr indent="0" marL="0">
               <a:lnSpc>
@@ -8918,7 +8922,7 @@
                 <a:ea typeface="Malgun Gothic" pitchFamily="34" charset="-122"/>
                 <a:cs typeface="Malgun Gothic" pitchFamily="34" charset="-120"/>
               </a:rPr>
-              <a:t>   (L2 정규화 → 코사인 유사도)</a:t>
+              <a:t xml:space="preserve">   (L2 정규화 → 코사인 유사도)</a:t>
             </a:r>
             <a:endParaRPr lang="en-US" sz="1020" dirty="0"/>
           </a:p>
@@ -8978,7 +8982,7 @@
                 <a:ea typeface="Malgun Gothic" pitchFamily="34" charset="-122"/>
                 <a:cs typeface="Malgun Gothic" pitchFamily="34" charset="-120"/>
               </a:rPr>
-              <a:t>   (LLM 없이 결정적 메타 부여)</a:t>
+              <a:t xml:space="preserve">   (LLM 없이 결정적 메타 부여)</a:t>
             </a:r>
             <a:endParaRPr lang="en-US" sz="1020" dirty="0"/>
           </a:p>
@@ -9018,7 +9022,7 @@
                 <a:ea typeface="Malgun Gothic" pitchFamily="34" charset="-122"/>
                 <a:cs typeface="Malgun Gothic" pitchFamily="34" charset="-120"/>
               </a:rPr>
-              <a:t>   section·answerable_intents·evidence_summary</a:t>
+              <a:t xml:space="preserve">   section·answerable_intents·evidence_summary</a:t>
             </a:r>
             <a:endParaRPr lang="en-US" sz="1020" dirty="0"/>
           </a:p>
@@ -9058,7 +9062,7 @@
                 <a:ea typeface="Malgun Gothic" pitchFamily="34" charset="-122"/>
                 <a:cs typeface="Malgun Gothic" pitchFamily="34" charset="-120"/>
               </a:rPr>
-              <a:t>   정책 변경 시 전체 재인덱싱</a:t>
+              <a:t xml:space="preserve">   정책 변경 시 전체 재인덱싱</a:t>
             </a:r>
             <a:endParaRPr lang="en-US" sz="1020" dirty="0"/>
           </a:p>
@@ -9268,7 +9272,7 @@
                 <a:ea typeface="Malgun Gothic" pitchFamily="34" charset="-122"/>
                 <a:cs typeface="Malgun Gothic" pitchFamily="34" charset="-120"/>
               </a:rPr>
-              <a:t>   충분 → 근거 답변 / 부족 → 재검색(≤2)·abstain</a:t>
+              <a:t xml:space="preserve">   충분 → 근거 답변 / 부족 → 재검색(≤2)·abstain</a:t>
             </a:r>
             <a:endParaRPr lang="en-US" sz="1020" dirty="0"/>
           </a:p>
@@ -9972,7 +9976,7 @@
                 <a:ea typeface="Malgun Gothic" pitchFamily="34" charset="-122"/>
                 <a:cs typeface="Malgun Gothic" pitchFamily="34" charset="-120"/>
               </a:rPr>
-              <a:t>오늘 16:00 마감 · </a:t>
+              <a:t xml:space="preserve">오늘 16:00 마감 · </a:t>
             </a:r>
             <a:pPr indent="0" marL="0">
               <a:buNone/>
@@ -10840,7 +10844,7 @@
                 <a:ea typeface="Malgun Gothic" pitchFamily="34" charset="-122"/>
                 <a:cs typeface="Malgun Gothic" pitchFamily="34" charset="-120"/>
               </a:rPr>
-              <a:t>   urgent 파생 컬럼(또는 뷰) 추가</a:t>
+              <a:t xml:space="preserve">   urgent 파생 컬럼(또는 뷰) 추가</a:t>
             </a:r>
             <a:endParaRPr lang="en-US" sz="1020" dirty="0"/>
           </a:p>
@@ -12191,6 +12195,586 @@
 </p:sld>
 </file>
 
+<file path=ppt/slides/slide19.xml><?xml version="1.0" encoding="utf-8"?>
+<p:sld xmlns:a="http://schemas.openxmlformats.org/drawingml/2006/main" xmlns:r="http://schemas.openxmlformats.org/officeDocument/2006/relationships" xmlns:p="http://schemas.openxmlformats.org/presentationml/2006/main">
+  <p:cSld name="Slide 10">
+    <p:bg>
+      <p:bgPr>
+        <a:solidFill>
+          <a:srgbClr val="263238"/>
+        </a:solidFill>
+      </p:bgPr>
+    </p:bg>
+    <p:spTree>
+      <p:nvGrpSpPr>
+        <p:cNvPr id="1" name=""/>
+        <p:cNvGrpSpPr/>
+        <p:nvPr/>
+      </p:nvGrpSpPr>
+      <p:grpSpPr>
+        <a:xfrm>
+          <a:off x="0" y="0"/>
+          <a:ext cx="0" cy="0"/>
+          <a:chOff x="0" y="0"/>
+          <a:chExt cx="0" cy="0"/>
+        </a:xfrm>
+      </p:grpSpPr>
+      <p:sp>
+        <p:nvSpPr>
+          <p:cNvPr id="2" name="Text 0"/>
+          <p:cNvSpPr/>
+          <p:nvPr/>
+        </p:nvSpPr>
+        <p:spPr>
+          <a:xfrm>
+            <a:off x="640080" y="1097280"/>
+            <a:ext cx="7863840" cy="320040"/>
+          </a:xfrm>
+          <a:prstGeom prst="rect">
+            <a:avLst/>
+          </a:prstGeom>
+          <a:noFill/>
+          <a:ln/>
+        </p:spPr>
+        <p:txBody>
+          <a:bodyPr wrap="square" lIns="0" tIns="0" rIns="0" bIns="0" rtlCol="0" anchor="ctr"/>
+          <a:lstStyle/>
+          <a:p>
+            <a:pPr indent="0" marL="0">
+              <a:buNone/>
+            </a:pPr>
+            <a:r>
+              <a:rPr lang="en-US" sz="1300" b="1" spc="300" kern="0" dirty="0">
+                <a:solidFill>
+                  <a:srgbClr val="7FD1CD"/>
+                </a:solidFill>
+                <a:latin typeface="Malgun Gothic" pitchFamily="34" charset="0"/>
+                <a:ea typeface="Malgun Gothic" pitchFamily="34" charset="-122"/>
+                <a:cs typeface="Malgun Gothic" pitchFamily="34" charset="-120"/>
+              </a:rPr>
+              <a:t>PROGRESS UPDATE · 2026.06.25</a:t>
+            </a:r>
+            <a:endParaRPr lang="en-US" sz="1300" dirty="0"/>
+          </a:p>
+        </p:txBody>
+      </p:sp>
+      <p:sp>
+        <p:nvSpPr>
+          <p:cNvPr id="3" name="Text 1"/>
+          <p:cNvSpPr/>
+          <p:nvPr/>
+        </p:nvSpPr>
+        <p:spPr>
+          <a:xfrm>
+            <a:off x="640080" y="1481328"/>
+            <a:ext cx="7863840" cy="822960"/>
+          </a:xfrm>
+          <a:prstGeom prst="rect">
+            <a:avLst/>
+          </a:prstGeom>
+          <a:noFill/>
+          <a:ln/>
+        </p:spPr>
+        <p:txBody>
+          <a:bodyPr wrap="square" lIns="0" tIns="0" rIns="0" bIns="0" rtlCol="0" anchor="ctr"/>
+          <a:lstStyle/>
+          <a:p>
+            <a:pPr indent="0" marL="0">
+              <a:buNone/>
+            </a:pPr>
+            <a:r>
+              <a:rPr lang="en-US" sz="4400" b="1" dirty="0">
+                <a:solidFill>
+                  <a:srgbClr val="FFFFFF"/>
+                </a:solidFill>
+                <a:latin typeface="Malgun Gothic" pitchFamily="34" charset="0"/>
+                <a:ea typeface="Malgun Gothic" pitchFamily="34" charset="-122"/>
+                <a:cs typeface="Malgun Gothic" pitchFamily="34" charset="-120"/>
+              </a:rPr>
+              <a:t>구현 진행 업데이트</a:t>
+            </a:r>
+            <a:endParaRPr lang="en-US" sz="4400" dirty="0"/>
+          </a:p>
+        </p:txBody>
+      </p:sp>
+      <p:sp>
+        <p:nvSpPr>
+          <p:cNvPr id="4" name="Text 2"/>
+          <p:cNvSpPr/>
+          <p:nvPr/>
+        </p:nvSpPr>
+        <p:spPr>
+          <a:xfrm>
+            <a:off x="640080" y="2432304"/>
+            <a:ext cx="7863840" cy="411480"/>
+          </a:xfrm>
+          <a:prstGeom prst="rect">
+            <a:avLst/>
+          </a:prstGeom>
+          <a:noFill/>
+          <a:ln/>
+        </p:spPr>
+        <p:txBody>
+          <a:bodyPr wrap="square" lIns="0" tIns="0" rIns="0" bIns="0" rtlCol="0" anchor="ctr"/>
+          <a:lstStyle/>
+          <a:p>
+            <a:pPr indent="0" marL="0">
+              <a:buNone/>
+            </a:pPr>
+            <a:r>
+              <a:rPr lang="en-US" sz="1400" dirty="0">
+                <a:solidFill>
+                  <a:srgbClr val="CFD8DC"/>
+                </a:solidFill>
+                <a:latin typeface="Malgun Gothic" pitchFamily="34" charset="0"/>
+                <a:ea typeface="Malgun Gothic" pitchFamily="34" charset="-122"/>
+                <a:cs typeface="Malgun Gothic" pitchFamily="34" charset="-120"/>
+              </a:rPr>
+              <a:t>2026.06.17 이후 추가 구현 — 운영 흐름 현실화 · 대화/관측 · 실시간 시뮬레이션.</a:t>
+            </a:r>
+            <a:endParaRPr lang="en-US" sz="1400" dirty="0"/>
+          </a:p>
+        </p:txBody>
+      </p:sp>
+      <p:sp>
+        <p:nvSpPr>
+          <p:cNvPr id="5" name="Shape 3"/>
+          <p:cNvSpPr/>
+          <p:nvPr/>
+        </p:nvSpPr>
+        <p:spPr>
+          <a:xfrm>
+            <a:off x="640080" y="3145536"/>
+            <a:ext cx="292608" cy="292608"/>
+          </a:xfrm>
+          <a:prstGeom prst="ellipse">
+            <a:avLst/>
+          </a:prstGeom>
+          <a:solidFill>
+            <a:srgbClr val="028090"/>
+          </a:solidFill>
+          <a:ln/>
+        </p:spPr>
+      </p:sp>
+      <p:sp>
+        <p:nvSpPr>
+          <p:cNvPr id="6" name="Text 4"/>
+          <p:cNvSpPr/>
+          <p:nvPr/>
+        </p:nvSpPr>
+        <p:spPr>
+          <a:xfrm>
+            <a:off x="640080" y="3145536"/>
+            <a:ext cx="292608" cy="292608"/>
+          </a:xfrm>
+          <a:prstGeom prst="rect">
+            <a:avLst/>
+          </a:prstGeom>
+          <a:noFill/>
+          <a:ln/>
+        </p:spPr>
+        <p:txBody>
+          <a:bodyPr wrap="square" lIns="0" tIns="0" rIns="0" bIns="0" rtlCol="0" anchor="ctr"/>
+          <a:lstStyle/>
+          <a:p>
+            <a:pPr algn="ctr" indent="0" marL="0">
+              <a:buNone/>
+            </a:pPr>
+            <a:r>
+              <a:rPr lang="en-US" sz="1200" b="1" dirty="0">
+                <a:solidFill>
+                  <a:srgbClr val="FFFFFF"/>
+                </a:solidFill>
+                <a:latin typeface="Malgun Gothic" pitchFamily="34" charset="0"/>
+                <a:ea typeface="Malgun Gothic" pitchFamily="34" charset="-122"/>
+                <a:cs typeface="Malgun Gothic" pitchFamily="34" charset="-120"/>
+              </a:rPr>
+              <a:t>1</a:t>
+            </a:r>
+            <a:endParaRPr lang="en-US" sz="1200" dirty="0"/>
+          </a:p>
+        </p:txBody>
+      </p:sp>
+      <p:sp>
+        <p:nvSpPr>
+          <p:cNvPr id="7" name="Text 5"/>
+          <p:cNvSpPr/>
+          <p:nvPr/>
+        </p:nvSpPr>
+        <p:spPr>
+          <a:xfrm>
+            <a:off x="1078992" y="3099816"/>
+            <a:ext cx="7315200" cy="384048"/>
+          </a:xfrm>
+          <a:prstGeom prst="rect">
+            <a:avLst/>
+          </a:prstGeom>
+          <a:noFill/>
+          <a:ln/>
+        </p:spPr>
+        <p:txBody>
+          <a:bodyPr wrap="square" lIns="0" tIns="0" rIns="0" bIns="0" rtlCol="0" anchor="ctr"/>
+          <a:lstStyle/>
+          <a:p>
+            <a:pPr indent="0" marL="0">
+              <a:buNone/>
+            </a:pPr>
+            <a:r>
+              <a:rPr lang="en-US" sz="1300" dirty="0">
+                <a:solidFill>
+                  <a:srgbClr val="ECEFF1"/>
+                </a:solidFill>
+                <a:latin typeface="Malgun Gothic" pitchFamily="34" charset="0"/>
+                <a:ea typeface="Malgun Gothic" pitchFamily="34" charset="-122"/>
+                <a:cs typeface="Malgun Gothic" pitchFamily="34" charset="-120"/>
+              </a:rPr>
+              <a:t>출고 할당 단계 · 예상 결품 (실 WMS 출고 흐름 반영)</a:t>
+            </a:r>
+            <a:endParaRPr lang="en-US" sz="1300" dirty="0"/>
+          </a:p>
+        </p:txBody>
+      </p:sp>
+      <p:sp>
+        <p:nvSpPr>
+          <p:cNvPr id="8" name="Shape 6"/>
+          <p:cNvSpPr/>
+          <p:nvPr/>
+        </p:nvSpPr>
+        <p:spPr>
+          <a:xfrm>
+            <a:off x="640080" y="3566160"/>
+            <a:ext cx="292608" cy="292608"/>
+          </a:xfrm>
+          <a:prstGeom prst="ellipse">
+            <a:avLst/>
+          </a:prstGeom>
+          <a:solidFill>
+            <a:srgbClr val="028090"/>
+          </a:solidFill>
+          <a:ln/>
+        </p:spPr>
+      </p:sp>
+      <p:sp>
+        <p:nvSpPr>
+          <p:cNvPr id="9" name="Text 7"/>
+          <p:cNvSpPr/>
+          <p:nvPr/>
+        </p:nvSpPr>
+        <p:spPr>
+          <a:xfrm>
+            <a:off x="640080" y="3566160"/>
+            <a:ext cx="292608" cy="292608"/>
+          </a:xfrm>
+          <a:prstGeom prst="rect">
+            <a:avLst/>
+          </a:prstGeom>
+          <a:noFill/>
+          <a:ln/>
+        </p:spPr>
+        <p:txBody>
+          <a:bodyPr wrap="square" lIns="0" tIns="0" rIns="0" bIns="0" rtlCol="0" anchor="ctr"/>
+          <a:lstStyle/>
+          <a:p>
+            <a:pPr algn="ctr" indent="0" marL="0">
+              <a:buNone/>
+            </a:pPr>
+            <a:r>
+              <a:rPr lang="en-US" sz="1200" b="1" dirty="0">
+                <a:solidFill>
+                  <a:srgbClr val="FFFFFF"/>
+                </a:solidFill>
+                <a:latin typeface="Malgun Gothic" pitchFamily="34" charset="0"/>
+                <a:ea typeface="Malgun Gothic" pitchFamily="34" charset="-122"/>
+                <a:cs typeface="Malgun Gothic" pitchFamily="34" charset="-120"/>
+              </a:rPr>
+              <a:t>2</a:t>
+            </a:r>
+            <a:endParaRPr lang="en-US" sz="1200" dirty="0"/>
+          </a:p>
+        </p:txBody>
+      </p:sp>
+      <p:sp>
+        <p:nvSpPr>
+          <p:cNvPr id="10" name="Text 8"/>
+          <p:cNvSpPr/>
+          <p:nvPr/>
+        </p:nvSpPr>
+        <p:spPr>
+          <a:xfrm>
+            <a:off x="1078992" y="3520440"/>
+            <a:ext cx="7315200" cy="384048"/>
+          </a:xfrm>
+          <a:prstGeom prst="rect">
+            <a:avLst/>
+          </a:prstGeom>
+          <a:noFill/>
+          <a:ln/>
+        </p:spPr>
+        <p:txBody>
+          <a:bodyPr wrap="square" lIns="0" tIns="0" rIns="0" bIns="0" rtlCol="0" anchor="ctr"/>
+          <a:lstStyle/>
+          <a:p>
+            <a:pPr indent="0" marL="0">
+              <a:buNone/>
+            </a:pPr>
+            <a:r>
+              <a:rPr lang="en-US" sz="1300" dirty="0">
+                <a:solidFill>
+                  <a:srgbClr val="ECEFF1"/>
+                </a:solidFill>
+                <a:latin typeface="Malgun Gothic" pitchFamily="34" charset="0"/>
+                <a:ea typeface="Malgun Gothic" pitchFamily="34" charset="-122"/>
+                <a:cs typeface="Malgun Gothic" pitchFamily="34" charset="-120"/>
+              </a:rPr>
+              <a:t>체화재고 · 재고 보충 (PICK/RESERVE 2단 재고)</a:t>
+            </a:r>
+            <a:endParaRPr lang="en-US" sz="1300" dirty="0"/>
+          </a:p>
+        </p:txBody>
+      </p:sp>
+      <p:sp>
+        <p:nvSpPr>
+          <p:cNvPr id="11" name="Shape 9"/>
+          <p:cNvSpPr/>
+          <p:nvPr/>
+        </p:nvSpPr>
+        <p:spPr>
+          <a:xfrm>
+            <a:off x="640080" y="3986784"/>
+            <a:ext cx="292608" cy="292608"/>
+          </a:xfrm>
+          <a:prstGeom prst="ellipse">
+            <a:avLst/>
+          </a:prstGeom>
+          <a:solidFill>
+            <a:srgbClr val="028090"/>
+          </a:solidFill>
+          <a:ln/>
+        </p:spPr>
+      </p:sp>
+      <p:sp>
+        <p:nvSpPr>
+          <p:cNvPr id="12" name="Text 10"/>
+          <p:cNvSpPr/>
+          <p:nvPr/>
+        </p:nvSpPr>
+        <p:spPr>
+          <a:xfrm>
+            <a:off x="640080" y="3986784"/>
+            <a:ext cx="292608" cy="292608"/>
+          </a:xfrm>
+          <a:prstGeom prst="rect">
+            <a:avLst/>
+          </a:prstGeom>
+          <a:noFill/>
+          <a:ln/>
+        </p:spPr>
+        <p:txBody>
+          <a:bodyPr wrap="square" lIns="0" tIns="0" rIns="0" bIns="0" rtlCol="0" anchor="ctr"/>
+          <a:lstStyle/>
+          <a:p>
+            <a:pPr algn="ctr" indent="0" marL="0">
+              <a:buNone/>
+            </a:pPr>
+            <a:r>
+              <a:rPr lang="en-US" sz="1200" b="1" dirty="0">
+                <a:solidFill>
+                  <a:srgbClr val="FFFFFF"/>
+                </a:solidFill>
+                <a:latin typeface="Malgun Gothic" pitchFamily="34" charset="0"/>
+                <a:ea typeface="Malgun Gothic" pitchFamily="34" charset="-122"/>
+                <a:cs typeface="Malgun Gothic" pitchFamily="34" charset="-120"/>
+              </a:rPr>
+              <a:t>3</a:t>
+            </a:r>
+            <a:endParaRPr lang="en-US" sz="1200" dirty="0"/>
+          </a:p>
+        </p:txBody>
+      </p:sp>
+      <p:sp>
+        <p:nvSpPr>
+          <p:cNvPr id="13" name="Text 11"/>
+          <p:cNvSpPr/>
+          <p:nvPr/>
+        </p:nvSpPr>
+        <p:spPr>
+          <a:xfrm>
+            <a:off x="1078992" y="3941064"/>
+            <a:ext cx="7315200" cy="384048"/>
+          </a:xfrm>
+          <a:prstGeom prst="rect">
+            <a:avLst/>
+          </a:prstGeom>
+          <a:noFill/>
+          <a:ln/>
+        </p:spPr>
+        <p:txBody>
+          <a:bodyPr wrap="square" lIns="0" tIns="0" rIns="0" bIns="0" rtlCol="0" anchor="ctr"/>
+          <a:lstStyle/>
+          <a:p>
+            <a:pPr indent="0" marL="0">
+              <a:buNone/>
+            </a:pPr>
+            <a:r>
+              <a:rPr lang="en-US" sz="1300" dirty="0">
+                <a:solidFill>
+                  <a:srgbClr val="ECEFF1"/>
+                </a:solidFill>
+                <a:latin typeface="Malgun Gothic" pitchFamily="34" charset="0"/>
+                <a:ea typeface="Malgun Gothic" pitchFamily="34" charset="-122"/>
+                <a:cs typeface="Malgun Gothic" pitchFamily="34" charset="-120"/>
+              </a:rPr>
+              <a:t>실시간 수요 발생(Toast) · 대화 메모리(세션 · 멀티턴 맥락)</a:t>
+            </a:r>
+            <a:endParaRPr lang="en-US" sz="1300" dirty="0"/>
+          </a:p>
+        </p:txBody>
+      </p:sp>
+      <p:sp>
+        <p:nvSpPr>
+          <p:cNvPr id="14" name="Shape 12"/>
+          <p:cNvSpPr/>
+          <p:nvPr/>
+        </p:nvSpPr>
+        <p:spPr>
+          <a:xfrm>
+            <a:off x="640080" y="4407408"/>
+            <a:ext cx="292608" cy="292608"/>
+          </a:xfrm>
+          <a:prstGeom prst="ellipse">
+            <a:avLst/>
+          </a:prstGeom>
+          <a:solidFill>
+            <a:srgbClr val="028090"/>
+          </a:solidFill>
+          <a:ln/>
+        </p:spPr>
+      </p:sp>
+      <p:sp>
+        <p:nvSpPr>
+          <p:cNvPr id="15" name="Text 13"/>
+          <p:cNvSpPr/>
+          <p:nvPr/>
+        </p:nvSpPr>
+        <p:spPr>
+          <a:xfrm>
+            <a:off x="640080" y="4407408"/>
+            <a:ext cx="292608" cy="292608"/>
+          </a:xfrm>
+          <a:prstGeom prst="rect">
+            <a:avLst/>
+          </a:prstGeom>
+          <a:noFill/>
+          <a:ln/>
+        </p:spPr>
+        <p:txBody>
+          <a:bodyPr wrap="square" lIns="0" tIns="0" rIns="0" bIns="0" rtlCol="0" anchor="ctr"/>
+          <a:lstStyle/>
+          <a:p>
+            <a:pPr algn="ctr" indent="0" marL="0">
+              <a:buNone/>
+            </a:pPr>
+            <a:r>
+              <a:rPr lang="en-US" sz="1200" b="1" dirty="0">
+                <a:solidFill>
+                  <a:srgbClr val="FFFFFF"/>
+                </a:solidFill>
+                <a:latin typeface="Malgun Gothic" pitchFamily="34" charset="0"/>
+                <a:ea typeface="Malgun Gothic" pitchFamily="34" charset="-122"/>
+                <a:cs typeface="Malgun Gothic" pitchFamily="34" charset="-120"/>
+              </a:rPr>
+              <a:t>4</a:t>
+            </a:r>
+            <a:endParaRPr lang="en-US" sz="1200" dirty="0"/>
+          </a:p>
+        </p:txBody>
+      </p:sp>
+      <p:sp>
+        <p:nvSpPr>
+          <p:cNvPr id="16" name="Text 14"/>
+          <p:cNvSpPr/>
+          <p:nvPr/>
+        </p:nvSpPr>
+        <p:spPr>
+          <a:xfrm>
+            <a:off x="1078992" y="4361688"/>
+            <a:ext cx="7315200" cy="384048"/>
+          </a:xfrm>
+          <a:prstGeom prst="rect">
+            <a:avLst/>
+          </a:prstGeom>
+          <a:noFill/>
+          <a:ln/>
+        </p:spPr>
+        <p:txBody>
+          <a:bodyPr wrap="square" lIns="0" tIns="0" rIns="0" bIns="0" rtlCol="0" anchor="ctr"/>
+          <a:lstStyle/>
+          <a:p>
+            <a:pPr indent="0" marL="0">
+              <a:buNone/>
+            </a:pPr>
+            <a:r>
+              <a:rPr lang="en-US" sz="1300" dirty="0">
+                <a:solidFill>
+                  <a:srgbClr val="ECEFF1"/>
+                </a:solidFill>
+                <a:latin typeface="Malgun Gothic" pitchFamily="34" charset="0"/>
+                <a:ea typeface="Malgun Gothic" pitchFamily="34" charset="-122"/>
+                <a:cs typeface="Malgun Gothic" pitchFamily="34" charset="-120"/>
+              </a:rPr>
+              <a:t>Approval·AI 동작 관측(트레이스) · 냉장/일반 · 고회전 슬로팅 · 지연비용 10배</a:t>
+            </a:r>
+            <a:endParaRPr lang="en-US" sz="1300" dirty="0"/>
+          </a:p>
+        </p:txBody>
+      </p:sp>
+      <p:sp>
+        <p:nvSpPr>
+          <p:cNvPr id="17" name="Text 15"/>
+          <p:cNvSpPr/>
+          <p:nvPr/>
+        </p:nvSpPr>
+        <p:spPr>
+          <a:xfrm>
+            <a:off x="640080" y="4828032"/>
+            <a:ext cx="7863840" cy="274320"/>
+          </a:xfrm>
+          <a:prstGeom prst="rect">
+            <a:avLst/>
+          </a:prstGeom>
+          <a:noFill/>
+          <a:ln/>
+        </p:spPr>
+        <p:txBody>
+          <a:bodyPr wrap="square" lIns="0" tIns="0" rIns="0" bIns="0" rtlCol="0" anchor="ctr"/>
+          <a:lstStyle/>
+          <a:p>
+            <a:pPr indent="0" marL="0">
+              <a:buNone/>
+            </a:pPr>
+            <a:r>
+              <a:rPr lang="en-US" sz="1100" b="1" dirty="0">
+                <a:solidFill>
+                  <a:srgbClr val="7FD1CD"/>
+                </a:solidFill>
+                <a:latin typeface="Malgun Gothic" pitchFamily="34" charset="0"/>
+                <a:ea typeface="Malgun Gothic" pitchFamily="34" charset="-122"/>
+                <a:cs typeface="Malgun Gothic" pitchFamily="34" charset="-120"/>
+              </a:rPr>
+              <a:t>Smart WMS Agent</a:t>
+            </a:r>
+            <a:endParaRPr lang="en-US" sz="1100" dirty="0"/>
+          </a:p>
+        </p:txBody>
+      </p:sp>
+    </p:spTree>
+  </p:cSld>
+  <p:clrMapOvr>
+    <a:masterClrMapping/>
+  </p:clrMapOvr>
+</p:sld>
+</file>
+
 <file path=ppt/slides/slide2.xml><?xml version="1.0" encoding="utf-8"?>
 <p:sld xmlns:a="http://schemas.openxmlformats.org/drawingml/2006/main" xmlns:r="http://schemas.openxmlformats.org/officeDocument/2006/relationships" xmlns:p="http://schemas.openxmlformats.org/presentationml/2006/main">
   <p:cSld name="Slide 2">
@@ -13156,6 +13740,2254 @@
               <a:t>재고부족·CAPA부족 등 표준 대응안</a:t>
             </a:r>
             <a:endParaRPr lang="en-US" sz="1300" dirty="0"/>
+          </a:p>
+        </p:txBody>
+      </p:sp>
+    </p:spTree>
+  </p:cSld>
+  <p:clrMapOvr>
+    <a:masterClrMapping/>
+  </p:clrMapOvr>
+</p:sld>
+</file>
+
+<file path=ppt/slides/slide20.xml><?xml version="1.0" encoding="utf-8"?>
+<p:sld xmlns:a="http://schemas.openxmlformats.org/drawingml/2006/main" xmlns:r="http://schemas.openxmlformats.org/officeDocument/2006/relationships" xmlns:p="http://schemas.openxmlformats.org/presentationml/2006/main">
+  <p:cSld name="Slide 11">
+    <p:bg>
+      <p:bgPr>
+        <a:solidFill>
+          <a:srgbClr val="FFFFFF"/>
+        </a:solidFill>
+      </p:bgPr>
+    </p:bg>
+    <p:spTree>
+      <p:nvGrpSpPr>
+        <p:cNvPr id="1" name=""/>
+        <p:cNvGrpSpPr/>
+        <p:nvPr/>
+      </p:nvGrpSpPr>
+      <p:grpSpPr>
+        <a:xfrm>
+          <a:off x="0" y="0"/>
+          <a:ext cx="0" cy="0"/>
+          <a:chOff x="0" y="0"/>
+          <a:chExt cx="0" cy="0"/>
+        </a:xfrm>
+      </p:grpSpPr>
+      <p:sp>
+        <p:nvSpPr>
+          <p:cNvPr id="2" name="Text 0"/>
+          <p:cNvSpPr/>
+          <p:nvPr/>
+        </p:nvSpPr>
+        <p:spPr>
+          <a:xfrm>
+            <a:off x="457200" y="292608"/>
+            <a:ext cx="8229600" cy="274320"/>
+          </a:xfrm>
+          <a:prstGeom prst="rect">
+            <a:avLst/>
+          </a:prstGeom>
+          <a:noFill/>
+          <a:ln/>
+        </p:spPr>
+        <p:txBody>
+          <a:bodyPr wrap="square" lIns="0" tIns="0" rIns="0" bIns="0" rtlCol="0" anchor="ctr"/>
+          <a:lstStyle/>
+          <a:p>
+            <a:pPr indent="0" marL="0">
+              <a:buNone/>
+            </a:pPr>
+            <a:r>
+              <a:rPr lang="en-US" sz="1100" b="1" spc="200" kern="0" dirty="0">
+                <a:solidFill>
+                  <a:srgbClr val="028090"/>
+                </a:solidFill>
+                <a:latin typeface="Malgun Gothic" pitchFamily="34" charset="0"/>
+                <a:ea typeface="Malgun Gothic" pitchFamily="34" charset="-122"/>
+                <a:cs typeface="Malgun Gothic" pitchFamily="34" charset="-120"/>
+              </a:rPr>
+              <a:t>IMPLEMENTATION STATUS</a:t>
+            </a:r>
+            <a:endParaRPr lang="en-US" sz="1100" dirty="0"/>
+          </a:p>
+        </p:txBody>
+      </p:sp>
+      <p:sp>
+        <p:nvSpPr>
+          <p:cNvPr id="3" name="Text 1"/>
+          <p:cNvSpPr/>
+          <p:nvPr/>
+        </p:nvSpPr>
+        <p:spPr>
+          <a:xfrm>
+            <a:off x="457200" y="530352"/>
+            <a:ext cx="8229600" cy="548640"/>
+          </a:xfrm>
+          <a:prstGeom prst="rect">
+            <a:avLst/>
+          </a:prstGeom>
+          <a:noFill/>
+          <a:ln/>
+        </p:spPr>
+        <p:txBody>
+          <a:bodyPr wrap="square" lIns="0" tIns="0" rIns="0" bIns="0" rtlCol="0" anchor="ctr"/>
+          <a:lstStyle/>
+          <a:p>
+            <a:pPr indent="0" marL="0">
+              <a:buNone/>
+            </a:pPr>
+            <a:r>
+              <a:rPr lang="en-US" sz="2700" b="1" dirty="0">
+                <a:solidFill>
+                  <a:srgbClr val="2B3A42"/>
+                </a:solidFill>
+                <a:latin typeface="Malgun Gothic" pitchFamily="34" charset="0"/>
+                <a:ea typeface="Malgun Gothic" pitchFamily="34" charset="-122"/>
+                <a:cs typeface="Malgun Gothic" pitchFamily="34" charset="-120"/>
+              </a:rPr>
+              <a:t>이번 추가 구현 — 2026.06.25</a:t>
+            </a:r>
+            <a:endParaRPr lang="en-US" sz="2700" dirty="0"/>
+          </a:p>
+        </p:txBody>
+      </p:sp>
+      <p:sp>
+        <p:nvSpPr>
+          <p:cNvPr id="4" name="Text 2"/>
+          <p:cNvSpPr/>
+          <p:nvPr/>
+        </p:nvSpPr>
+        <p:spPr>
+          <a:xfrm>
+            <a:off x="457200" y="1060704"/>
+            <a:ext cx="8229600" cy="320040"/>
+          </a:xfrm>
+          <a:prstGeom prst="rect">
+            <a:avLst/>
+          </a:prstGeom>
+          <a:noFill/>
+          <a:ln/>
+        </p:spPr>
+        <p:txBody>
+          <a:bodyPr wrap="square" lIns="0" tIns="0" rIns="0" bIns="0" rtlCol="0" anchor="ctr"/>
+          <a:lstStyle/>
+          <a:p>
+            <a:pPr indent="0" marL="0">
+              <a:buNone/>
+            </a:pPr>
+            <a:r>
+              <a:rPr lang="en-US" sz="1150" dirty="0">
+                <a:solidFill>
+                  <a:srgbClr val="6B7A85"/>
+                </a:solidFill>
+                <a:latin typeface="Malgun Gothic" pitchFamily="34" charset="0"/>
+                <a:ea typeface="Malgun Gothic" pitchFamily="34" charset="-122"/>
+                <a:cs typeface="Malgun Gothic" pitchFamily="34" charset="-120"/>
+              </a:rPr>
+              <a:t>실 WMS(BGF로지스) 출고 흐름 반영 + 대화/관측/실시간 — 전 항목 평가 하네스 40/40 통과</a:t>
+            </a:r>
+            <a:endParaRPr lang="en-US" sz="1150" dirty="0"/>
+          </a:p>
+        </p:txBody>
+      </p:sp>
+      <p:sp>
+        <p:nvSpPr>
+          <p:cNvPr id="5" name="Shape 3"/>
+          <p:cNvSpPr/>
+          <p:nvPr/>
+        </p:nvSpPr>
+        <p:spPr>
+          <a:xfrm>
+            <a:off x="457200" y="1463040"/>
+            <a:ext cx="2679192" cy="1371600"/>
+          </a:xfrm>
+          <a:prstGeom prst="roundRect">
+            <a:avLst>
+              <a:gd name="adj" fmla="val 4667"/>
+            </a:avLst>
+          </a:prstGeom>
+          <a:solidFill>
+            <a:srgbClr val="F4F6F7"/>
+          </a:solidFill>
+          <a:ln/>
+        </p:spPr>
+      </p:sp>
+      <p:sp>
+        <p:nvSpPr>
+          <p:cNvPr id="6" name="Text 4"/>
+          <p:cNvSpPr/>
+          <p:nvPr/>
+        </p:nvSpPr>
+        <p:spPr>
+          <a:xfrm>
+            <a:off x="640080" y="1600200"/>
+            <a:ext cx="2313432" cy="1097280"/>
+          </a:xfrm>
+          <a:prstGeom prst="rect">
+            <a:avLst/>
+          </a:prstGeom>
+          <a:noFill/>
+          <a:ln/>
+        </p:spPr>
+        <p:txBody>
+          <a:bodyPr wrap="square" lIns="0" tIns="0" rIns="0" bIns="0" rtlCol="0" anchor="t"/>
+          <a:lstStyle/>
+          <a:p>
+            <a:pPr indent="0" marL="0">
+              <a:buNone/>
+            </a:pPr>
+            <a:r>
+              <a:rPr lang="en-US" sz="1350" b="1" dirty="0">
+                <a:solidFill>
+                  <a:srgbClr val="2B3A42"/>
+                </a:solidFill>
+                <a:latin typeface="Malgun Gothic" pitchFamily="34" charset="0"/>
+                <a:ea typeface="Malgun Gothic" pitchFamily="34" charset="-122"/>
+                <a:cs typeface="Malgun Gothic" pitchFamily="34" charset="-120"/>
+              </a:rPr>
+              <a:t>출고 할당 · 결품</a:t>
+            </a:r>
+            <a:endParaRPr lang="en-US" sz="1350" dirty="0"/>
+          </a:p>
+          <a:p>
+            <a:pPr indent="0" marL="0">
+              <a:buNone/>
+            </a:pPr>
+            <a:endParaRPr lang="en-US" sz="1350" dirty="0"/>
+          </a:p>
+          <a:p>
+            <a:pPr indent="0" marL="0">
+              <a:buNone/>
+            </a:pPr>
+            <a:r>
+              <a:rPr lang="en-US" sz="980" dirty="0">
+                <a:solidFill>
+                  <a:srgbClr val="6B7A85"/>
+                </a:solidFill>
+                <a:latin typeface="Malgun Gothic" pitchFamily="34" charset="0"/>
+                <a:ea typeface="Malgun Gothic" pitchFamily="34" charset="-122"/>
+                <a:cs typeface="Malgun Gothic" pitchFamily="34" charset="-120"/>
+              </a:rPr>
+              <a:t>예정→할당→피킹→확정 수량 세분화 · ATP 예상결품 KPI</a:t>
+            </a:r>
+            <a:endParaRPr lang="en-US" sz="1350" dirty="0"/>
+          </a:p>
+          <a:p>
+            <a:pPr indent="0" marL="0">
+              <a:buNone/>
+            </a:pPr>
+            <a:r>
+              <a:rPr lang="en-US" sz="980" dirty="0">
+                <a:solidFill>
+                  <a:srgbClr val="6B7A85"/>
+                </a:solidFill>
+                <a:latin typeface="Malgun Gothic" pitchFamily="34" charset="0"/>
+                <a:ea typeface="Malgun Gothic" pitchFamily="34" charset="-122"/>
+                <a:cs typeface="Malgun Gothic" pitchFamily="34" charset="-120"/>
+              </a:rPr>
+              <a:t>allocation.py · Draft(ALLOCATION)</a:t>
+            </a:r>
+            <a:endParaRPr lang="en-US" sz="1350" dirty="0"/>
+          </a:p>
+        </p:txBody>
+      </p:sp>
+      <p:sp>
+        <p:nvSpPr>
+          <p:cNvPr id="7" name="Shape 5"/>
+          <p:cNvSpPr/>
+          <p:nvPr/>
+        </p:nvSpPr>
+        <p:spPr>
+          <a:xfrm>
+            <a:off x="3328416" y="1463040"/>
+            <a:ext cx="2679192" cy="1371600"/>
+          </a:xfrm>
+          <a:prstGeom prst="roundRect">
+            <a:avLst>
+              <a:gd name="adj" fmla="val 4667"/>
+            </a:avLst>
+          </a:prstGeom>
+          <a:solidFill>
+            <a:srgbClr val="F4F6F7"/>
+          </a:solidFill>
+          <a:ln/>
+        </p:spPr>
+      </p:sp>
+      <p:sp>
+        <p:nvSpPr>
+          <p:cNvPr id="8" name="Text 6"/>
+          <p:cNvSpPr/>
+          <p:nvPr/>
+        </p:nvSpPr>
+        <p:spPr>
+          <a:xfrm>
+            <a:off x="3511296" y="1600200"/>
+            <a:ext cx="2313432" cy="1097280"/>
+          </a:xfrm>
+          <a:prstGeom prst="rect">
+            <a:avLst/>
+          </a:prstGeom>
+          <a:noFill/>
+          <a:ln/>
+        </p:spPr>
+        <p:txBody>
+          <a:bodyPr wrap="square" lIns="0" tIns="0" rIns="0" bIns="0" rtlCol="0" anchor="t"/>
+          <a:lstStyle/>
+          <a:p>
+            <a:pPr indent="0" marL="0">
+              <a:buNone/>
+            </a:pPr>
+            <a:r>
+              <a:rPr lang="en-US" sz="1350" b="1" dirty="0">
+                <a:solidFill>
+                  <a:srgbClr val="2B3A42"/>
+                </a:solidFill>
+                <a:latin typeface="Malgun Gothic" pitchFamily="34" charset="0"/>
+                <a:ea typeface="Malgun Gothic" pitchFamily="34" charset="-122"/>
+                <a:cs typeface="Malgun Gothic" pitchFamily="34" charset="-120"/>
+              </a:rPr>
+              <a:t>체화 · 보충</a:t>
+            </a:r>
+            <a:endParaRPr lang="en-US" sz="1350" dirty="0"/>
+          </a:p>
+          <a:p>
+            <a:pPr indent="0" marL="0">
+              <a:buNone/>
+            </a:pPr>
+            <a:endParaRPr lang="en-US" sz="1350" dirty="0"/>
+          </a:p>
+          <a:p>
+            <a:pPr indent="0" marL="0">
+              <a:buNone/>
+            </a:pPr>
+            <a:r>
+              <a:rPr lang="en-US" sz="980" dirty="0">
+                <a:solidFill>
+                  <a:srgbClr val="6B7A85"/>
+                </a:solidFill>
+                <a:latin typeface="Malgun Gothic" pitchFamily="34" charset="0"/>
+                <a:ea typeface="Malgun Gothic" pitchFamily="34" charset="-122"/>
+                <a:cs typeface="Malgun Gothic" pitchFamily="34" charset="-120"/>
+              </a:rPr>
+              <a:t>EXPIRING/DEAD/SLOW 등급·처분 · PICK/RESERVE 2단 보충</a:t>
+            </a:r>
+            <a:endParaRPr lang="en-US" sz="1350" dirty="0"/>
+          </a:p>
+          <a:p>
+            <a:pPr indent="0" marL="0">
+              <a:buNone/>
+            </a:pPr>
+            <a:r>
+              <a:rPr lang="en-US" sz="980" dirty="0">
+                <a:solidFill>
+                  <a:srgbClr val="6B7A85"/>
+                </a:solidFill>
+                <a:latin typeface="Malgun Gothic" pitchFamily="34" charset="0"/>
+                <a:ea typeface="Malgun Gothic" pitchFamily="34" charset="-122"/>
+                <a:cs typeface="Malgun Gothic" pitchFamily="34" charset="-120"/>
+              </a:rPr>
+              <a:t>dead_stock.py · replenishment.py</a:t>
+            </a:r>
+            <a:endParaRPr lang="en-US" sz="1350" dirty="0"/>
+          </a:p>
+        </p:txBody>
+      </p:sp>
+      <p:sp>
+        <p:nvSpPr>
+          <p:cNvPr id="9" name="Shape 7"/>
+          <p:cNvSpPr/>
+          <p:nvPr/>
+        </p:nvSpPr>
+        <p:spPr>
+          <a:xfrm>
+            <a:off x="6199632" y="1463040"/>
+            <a:ext cx="2679192" cy="1371600"/>
+          </a:xfrm>
+          <a:prstGeom prst="roundRect">
+            <a:avLst>
+              <a:gd name="adj" fmla="val 4667"/>
+            </a:avLst>
+          </a:prstGeom>
+          <a:solidFill>
+            <a:srgbClr val="EDF5F6"/>
+          </a:solidFill>
+          <a:ln/>
+        </p:spPr>
+      </p:sp>
+      <p:sp>
+        <p:nvSpPr>
+          <p:cNvPr id="10" name="Text 8"/>
+          <p:cNvSpPr/>
+          <p:nvPr/>
+        </p:nvSpPr>
+        <p:spPr>
+          <a:xfrm>
+            <a:off x="6382512" y="1600200"/>
+            <a:ext cx="2313432" cy="1097280"/>
+          </a:xfrm>
+          <a:prstGeom prst="rect">
+            <a:avLst/>
+          </a:prstGeom>
+          <a:noFill/>
+          <a:ln/>
+        </p:spPr>
+        <p:txBody>
+          <a:bodyPr wrap="square" lIns="0" tIns="0" rIns="0" bIns="0" rtlCol="0" anchor="t"/>
+          <a:lstStyle/>
+          <a:p>
+            <a:pPr indent="0" marL="0">
+              <a:buNone/>
+            </a:pPr>
+            <a:r>
+              <a:rPr lang="en-US" sz="1350" b="1" dirty="0">
+                <a:solidFill>
+                  <a:srgbClr val="028090"/>
+                </a:solidFill>
+                <a:latin typeface="Malgun Gothic" pitchFamily="34" charset="0"/>
+                <a:ea typeface="Malgun Gothic" pitchFamily="34" charset="-122"/>
+                <a:cs typeface="Malgun Gothic" pitchFamily="34" charset="-120"/>
+              </a:rPr>
+              <a:t>실시간 수요</a:t>
+            </a:r>
+            <a:endParaRPr lang="en-US" sz="1350" dirty="0"/>
+          </a:p>
+          <a:p>
+            <a:pPr indent="0" marL="0">
+              <a:buNone/>
+            </a:pPr>
+            <a:endParaRPr lang="en-US" sz="1350" dirty="0"/>
+          </a:p>
+          <a:p>
+            <a:pPr indent="0" marL="0">
+              <a:buNone/>
+            </a:pPr>
+            <a:r>
+              <a:rPr lang="en-US" sz="980" dirty="0">
+                <a:solidFill>
+                  <a:srgbClr val="6B7A85"/>
+                </a:solidFill>
+                <a:latin typeface="Malgun Gothic" pitchFamily="34" charset="0"/>
+                <a:ea typeface="Malgun Gothic" pitchFamily="34" charset="-122"/>
+                <a:cs typeface="Malgun Gothic" pitchFamily="34" charset="-120"/>
+              </a:rPr>
+              <a:t>가상 입·출고 생성→DB→SSE Toast · 설정모달 · LLM 즉시 인지</a:t>
+            </a:r>
+            <a:endParaRPr lang="en-US" sz="1350" dirty="0"/>
+          </a:p>
+          <a:p>
+            <a:pPr indent="0" marL="0">
+              <a:buNone/>
+            </a:pPr>
+            <a:r>
+              <a:rPr lang="en-US" sz="980" dirty="0">
+                <a:solidFill>
+                  <a:srgbClr val="6B7A85"/>
+                </a:solidFill>
+                <a:latin typeface="Malgun Gothic" pitchFamily="34" charset="0"/>
+                <a:ea typeface="Malgun Gothic" pitchFamily="34" charset="-122"/>
+                <a:cs typeface="Malgun Gothic" pitchFamily="34" charset="-120"/>
+              </a:rPr>
+              <a:t>realtime.py</a:t>
+            </a:r>
+            <a:endParaRPr lang="en-US" sz="1350" dirty="0"/>
+          </a:p>
+        </p:txBody>
+      </p:sp>
+      <p:sp>
+        <p:nvSpPr>
+          <p:cNvPr id="11" name="Shape 9"/>
+          <p:cNvSpPr/>
+          <p:nvPr/>
+        </p:nvSpPr>
+        <p:spPr>
+          <a:xfrm>
+            <a:off x="457200" y="3017520"/>
+            <a:ext cx="2679192" cy="1371600"/>
+          </a:xfrm>
+          <a:prstGeom prst="roundRect">
+            <a:avLst>
+              <a:gd name="adj" fmla="val 4667"/>
+            </a:avLst>
+          </a:prstGeom>
+          <a:solidFill>
+            <a:srgbClr val="F4F6F7"/>
+          </a:solidFill>
+          <a:ln/>
+        </p:spPr>
+      </p:sp>
+      <p:sp>
+        <p:nvSpPr>
+          <p:cNvPr id="12" name="Text 10"/>
+          <p:cNvSpPr/>
+          <p:nvPr/>
+        </p:nvSpPr>
+        <p:spPr>
+          <a:xfrm>
+            <a:off x="640080" y="3154680"/>
+            <a:ext cx="2313432" cy="1097280"/>
+          </a:xfrm>
+          <a:prstGeom prst="rect">
+            <a:avLst/>
+          </a:prstGeom>
+          <a:noFill/>
+          <a:ln/>
+        </p:spPr>
+        <p:txBody>
+          <a:bodyPr wrap="square" lIns="0" tIns="0" rIns="0" bIns="0" rtlCol="0" anchor="t"/>
+          <a:lstStyle/>
+          <a:p>
+            <a:pPr indent="0" marL="0">
+              <a:buNone/>
+            </a:pPr>
+            <a:r>
+              <a:rPr lang="en-US" sz="1350" b="1" dirty="0">
+                <a:solidFill>
+                  <a:srgbClr val="2B3A42"/>
+                </a:solidFill>
+                <a:latin typeface="Malgun Gothic" pitchFamily="34" charset="0"/>
+                <a:ea typeface="Malgun Gothic" pitchFamily="34" charset="-122"/>
+                <a:cs typeface="Malgun Gothic" pitchFamily="34" charset="-120"/>
+              </a:rPr>
+              <a:t>대화 메모리</a:t>
+            </a:r>
+            <a:endParaRPr lang="en-US" sz="1350" dirty="0"/>
+          </a:p>
+          <a:p>
+            <a:pPr indent="0" marL="0">
+              <a:buNone/>
+            </a:pPr>
+            <a:endParaRPr lang="en-US" sz="1350" dirty="0"/>
+          </a:p>
+          <a:p>
+            <a:pPr indent="0" marL="0">
+              <a:buNone/>
+            </a:pPr>
+            <a:r>
+              <a:rPr lang="en-US" sz="980" dirty="0">
+                <a:solidFill>
+                  <a:srgbClr val="6B7A85"/>
+                </a:solidFill>
+                <a:latin typeface="Malgun Gothic" pitchFamily="34" charset="0"/>
+                <a:ea typeface="Malgun Gothic" pitchFamily="34" charset="-122"/>
+                <a:cs typeface="Malgun Gothic" pitchFamily="34" charset="-120"/>
+              </a:rPr>
+              <a:t>세션 저장·복원(사이드바) + 멀티턴 맥락(대명사 해소)</a:t>
+            </a:r>
+            <a:endParaRPr lang="en-US" sz="1350" dirty="0"/>
+          </a:p>
+          <a:p>
+            <a:pPr indent="0" marL="0">
+              <a:buNone/>
+            </a:pPr>
+            <a:r>
+              <a:rPr lang="en-US" sz="980" dirty="0">
+                <a:solidFill>
+                  <a:srgbClr val="6B7A85"/>
+                </a:solidFill>
+                <a:latin typeface="Malgun Gothic" pitchFamily="34" charset="0"/>
+                <a:ea typeface="Malgun Gothic" pitchFamily="34" charset="-122"/>
+                <a:cs typeface="Malgun Gothic" pitchFamily="34" charset="-120"/>
+              </a:rPr>
+              <a:t>chat_store.py</a:t>
+            </a:r>
+            <a:endParaRPr lang="en-US" sz="1350" dirty="0"/>
+          </a:p>
+        </p:txBody>
+      </p:sp>
+      <p:sp>
+        <p:nvSpPr>
+          <p:cNvPr id="13" name="Shape 11"/>
+          <p:cNvSpPr/>
+          <p:nvPr/>
+        </p:nvSpPr>
+        <p:spPr>
+          <a:xfrm>
+            <a:off x="3328416" y="3017520"/>
+            <a:ext cx="2679192" cy="1371600"/>
+          </a:xfrm>
+          <a:prstGeom prst="roundRect">
+            <a:avLst>
+              <a:gd name="adj" fmla="val 4667"/>
+            </a:avLst>
+          </a:prstGeom>
+          <a:solidFill>
+            <a:srgbClr val="F4F6F7"/>
+          </a:solidFill>
+          <a:ln/>
+        </p:spPr>
+      </p:sp>
+      <p:sp>
+        <p:nvSpPr>
+          <p:cNvPr id="14" name="Text 12"/>
+          <p:cNvSpPr/>
+          <p:nvPr/>
+        </p:nvSpPr>
+        <p:spPr>
+          <a:xfrm>
+            <a:off x="3511296" y="3154680"/>
+            <a:ext cx="2313432" cy="1097280"/>
+          </a:xfrm>
+          <a:prstGeom prst="rect">
+            <a:avLst/>
+          </a:prstGeom>
+          <a:noFill/>
+          <a:ln/>
+        </p:spPr>
+        <p:txBody>
+          <a:bodyPr wrap="square" lIns="0" tIns="0" rIns="0" bIns="0" rtlCol="0" anchor="t"/>
+          <a:lstStyle/>
+          <a:p>
+            <a:pPr indent="0" marL="0">
+              <a:buNone/>
+            </a:pPr>
+            <a:r>
+              <a:rPr lang="en-US" sz="1350" b="1" dirty="0">
+                <a:solidFill>
+                  <a:srgbClr val="2B3A42"/>
+                </a:solidFill>
+                <a:latin typeface="Malgun Gothic" pitchFamily="34" charset="0"/>
+                <a:ea typeface="Malgun Gothic" pitchFamily="34" charset="-122"/>
+                <a:cs typeface="Malgun Gothic" pitchFamily="34" charset="-120"/>
+              </a:rPr>
+              <a:t>Approval · 관측</a:t>
+            </a:r>
+            <a:endParaRPr lang="en-US" sz="1350" dirty="0"/>
+          </a:p>
+          <a:p>
+            <a:pPr indent="0" marL="0">
+              <a:buNone/>
+            </a:pPr>
+            <a:endParaRPr lang="en-US" sz="1350" dirty="0"/>
+          </a:p>
+          <a:p>
+            <a:pPr indent="0" marL="0">
+              <a:buNone/>
+            </a:pPr>
+            <a:r>
+              <a:rPr lang="en-US" sz="980" dirty="0">
+                <a:solidFill>
+                  <a:srgbClr val="6B7A85"/>
+                </a:solidFill>
+                <a:latin typeface="Malgun Gothic" pitchFamily="34" charset="0"/>
+                <a:ea typeface="Malgun Gothic" pitchFamily="34" charset="-122"/>
+                <a:cs typeface="Malgun Gothic" pitchFamily="34" charset="-120"/>
+              </a:rPr>
+              <a:t>상태변경 승인 통합 화면 · LangGraph/RAG 트레이스</a:t>
+            </a:r>
+            <a:endParaRPr lang="en-US" sz="1350" dirty="0"/>
+          </a:p>
+          <a:p>
+            <a:pPr indent="0" marL="0">
+              <a:buNone/>
+            </a:pPr>
+            <a:r>
+              <a:rPr lang="en-US" sz="980" dirty="0">
+                <a:solidFill>
+                  <a:srgbClr val="6B7A85"/>
+                </a:solidFill>
+                <a:latin typeface="Malgun Gothic" pitchFamily="34" charset="0"/>
+                <a:ea typeface="Malgun Gothic" pitchFamily="34" charset="-122"/>
+                <a:cs typeface="Malgun Gothic" pitchFamily="34" charset="-120"/>
+              </a:rPr>
+              <a:t>trace_store.py · web SPA</a:t>
+            </a:r>
+            <a:endParaRPr lang="en-US" sz="1350" dirty="0"/>
+          </a:p>
+        </p:txBody>
+      </p:sp>
+      <p:sp>
+        <p:nvSpPr>
+          <p:cNvPr id="15" name="Shape 13"/>
+          <p:cNvSpPr/>
+          <p:nvPr/>
+        </p:nvSpPr>
+        <p:spPr>
+          <a:xfrm>
+            <a:off x="6199632" y="3017520"/>
+            <a:ext cx="2679192" cy="1371600"/>
+          </a:xfrm>
+          <a:prstGeom prst="roundRect">
+            <a:avLst>
+              <a:gd name="adj" fmla="val 4667"/>
+            </a:avLst>
+          </a:prstGeom>
+          <a:solidFill>
+            <a:srgbClr val="F4F6F7"/>
+          </a:solidFill>
+          <a:ln/>
+        </p:spPr>
+      </p:sp>
+      <p:sp>
+        <p:nvSpPr>
+          <p:cNvPr id="16" name="Text 14"/>
+          <p:cNvSpPr/>
+          <p:nvPr/>
+        </p:nvSpPr>
+        <p:spPr>
+          <a:xfrm>
+            <a:off x="6382512" y="3154680"/>
+            <a:ext cx="2313432" cy="1097280"/>
+          </a:xfrm>
+          <a:prstGeom prst="rect">
+            <a:avLst/>
+          </a:prstGeom>
+          <a:noFill/>
+          <a:ln/>
+        </p:spPr>
+        <p:txBody>
+          <a:bodyPr wrap="square" lIns="0" tIns="0" rIns="0" bIns="0" rtlCol="0" anchor="t"/>
+          <a:lstStyle/>
+          <a:p>
+            <a:pPr indent="0" marL="0">
+              <a:buNone/>
+            </a:pPr>
+            <a:r>
+              <a:rPr lang="en-US" sz="1350" b="1" dirty="0">
+                <a:solidFill>
+                  <a:srgbClr val="2B3A42"/>
+                </a:solidFill>
+                <a:latin typeface="Malgun Gothic" pitchFamily="34" charset="0"/>
+                <a:ea typeface="Malgun Gothic" pitchFamily="34" charset="-122"/>
+                <a:cs typeface="Malgun Gothic" pitchFamily="34" charset="-120"/>
+              </a:rPr>
+              <a:t>냉장·고회전·지연</a:t>
+            </a:r>
+            <a:endParaRPr lang="en-US" sz="1350" dirty="0"/>
+          </a:p>
+          <a:p>
+            <a:pPr indent="0" marL="0">
+              <a:buNone/>
+            </a:pPr>
+            <a:endParaRPr lang="en-US" sz="1350" dirty="0"/>
+          </a:p>
+          <a:p>
+            <a:pPr indent="0" marL="0">
+              <a:buNone/>
+            </a:pPr>
+            <a:r>
+              <a:rPr lang="en-US" sz="980" dirty="0">
+                <a:solidFill>
+                  <a:srgbClr val="6B7A85"/>
+                </a:solidFill>
+                <a:latin typeface="Malgun Gothic" pitchFamily="34" charset="0"/>
+                <a:ea typeface="Malgun Gothic" pitchFamily="34" charset="-122"/>
+                <a:cs typeface="Malgun Gothic" pitchFamily="34" charset="-120"/>
+              </a:rPr>
+              <a:t>냉장/일반 2종·격리·트윈 표현 · 고회전 입구 슬로팅 · 지연 10배</a:t>
+            </a:r>
+            <a:endParaRPr lang="en-US" sz="1350" dirty="0"/>
+          </a:p>
+          <a:p>
+            <a:pPr indent="0" marL="0">
+              <a:buNone/>
+            </a:pPr>
+            <a:r>
+              <a:rPr lang="en-US" sz="980" dirty="0">
+                <a:solidFill>
+                  <a:srgbClr val="6B7A85"/>
+                </a:solidFill>
+                <a:latin typeface="Malgun Gothic" pitchFamily="34" charset="0"/>
+                <a:ea typeface="Malgun Gothic" pitchFamily="34" charset="-122"/>
+                <a:cs typeface="Malgun Gothic" pitchFamily="34" charset="-120"/>
+              </a:rPr>
+              <a:t>des.py · stocking.py</a:t>
+            </a:r>
+            <a:endParaRPr lang="en-US" sz="1350" dirty="0"/>
+          </a:p>
+        </p:txBody>
+      </p:sp>
+      <p:sp>
+        <p:nvSpPr>
+          <p:cNvPr id="17" name="Shape 15"/>
+          <p:cNvSpPr/>
+          <p:nvPr/>
+        </p:nvSpPr>
+        <p:spPr>
+          <a:xfrm>
+            <a:off x="457200" y="4526280"/>
+            <a:ext cx="8229600" cy="502920"/>
+          </a:xfrm>
+          <a:prstGeom prst="roundRect">
+            <a:avLst>
+              <a:gd name="adj" fmla="val 12727"/>
+            </a:avLst>
+          </a:prstGeom>
+          <a:solidFill>
+            <a:srgbClr val="EDF5F6"/>
+          </a:solidFill>
+          <a:ln/>
+        </p:spPr>
+      </p:sp>
+      <p:sp>
+        <p:nvSpPr>
+          <p:cNvPr id="18" name="Text 16"/>
+          <p:cNvSpPr/>
+          <p:nvPr/>
+        </p:nvSpPr>
+        <p:spPr>
+          <a:xfrm>
+            <a:off x="658368" y="4526280"/>
+            <a:ext cx="7863840" cy="502920"/>
+          </a:xfrm>
+          <a:prstGeom prst="rect">
+            <a:avLst/>
+          </a:prstGeom>
+          <a:noFill/>
+          <a:ln/>
+        </p:spPr>
+        <p:txBody>
+          <a:bodyPr wrap="square" lIns="0" tIns="0" rIns="0" bIns="0" rtlCol="0" anchor="ctr"/>
+          <a:lstStyle/>
+          <a:p>
+            <a:pPr indent="0" marL="0">
+              <a:buNone/>
+            </a:pPr>
+            <a:r>
+              <a:rPr lang="en-US" sz="1050" b="1" dirty="0">
+                <a:solidFill>
+                  <a:srgbClr val="028090"/>
+                </a:solidFill>
+                <a:latin typeface="Malgun Gothic" pitchFamily="34" charset="0"/>
+                <a:ea typeface="Malgun Gothic" pitchFamily="34" charset="-122"/>
+                <a:cs typeface="Malgun Gothic" pitchFamily="34" charset="-120"/>
+              </a:rPr>
+              <a:t xml:space="preserve">평가 하네스  </a:t>
+            </a:r>
+            <a:pPr indent="0" marL="0">
+              <a:buNone/>
+            </a:pPr>
+            <a:r>
+              <a:rPr lang="en-US" sz="1050" dirty="0">
+                <a:solidFill>
+                  <a:srgbClr val="2B3A42"/>
+                </a:solidFill>
+                <a:latin typeface="Malgun Gothic" pitchFamily="34" charset="0"/>
+                <a:ea typeface="Malgun Gothic" pitchFamily="34" charset="-122"/>
+                <a:cs typeface="Malgun Gothic" pitchFamily="34" charset="-120"/>
+              </a:rPr>
+              <a:t>9종 · 40체크 — 할당/결품·체화/보충 추가 + 기존(결정성·정규화·재현성·Forecast·Intent·RAG·Grounding) (eval/harness.py)</a:t>
+            </a:r>
+            <a:endParaRPr lang="en-US" sz="1050" dirty="0"/>
+          </a:p>
+        </p:txBody>
+      </p:sp>
+    </p:spTree>
+  </p:cSld>
+  <p:clrMapOvr>
+    <a:masterClrMapping/>
+  </p:clrMapOvr>
+</p:sld>
+</file>
+
+<file path=ppt/slides/slide21.xml><?xml version="1.0" encoding="utf-8"?>
+<p:sld xmlns:a="http://schemas.openxmlformats.org/drawingml/2006/main" xmlns:r="http://schemas.openxmlformats.org/officeDocument/2006/relationships" xmlns:p="http://schemas.openxmlformats.org/presentationml/2006/main">
+  <p:cSld name="Slide 14">
+    <p:bg>
+      <p:bgPr>
+        <a:solidFill>
+          <a:srgbClr val="FFFFFF"/>
+        </a:solidFill>
+      </p:bgPr>
+    </p:bg>
+    <p:spTree>
+      <p:nvGrpSpPr>
+        <p:cNvPr id="1" name=""/>
+        <p:cNvGrpSpPr/>
+        <p:nvPr/>
+      </p:nvGrpSpPr>
+      <p:grpSpPr>
+        <a:xfrm>
+          <a:off x="0" y="0"/>
+          <a:ext cx="0" cy="0"/>
+          <a:chOff x="0" y="0"/>
+          <a:chExt cx="0" cy="0"/>
+        </a:xfrm>
+      </p:grpSpPr>
+      <p:sp>
+        <p:nvSpPr>
+          <p:cNvPr id="2" name="Text 0"/>
+          <p:cNvSpPr/>
+          <p:nvPr/>
+        </p:nvSpPr>
+        <p:spPr>
+          <a:xfrm>
+            <a:off x="457200" y="292608"/>
+            <a:ext cx="8229600" cy="274320"/>
+          </a:xfrm>
+          <a:prstGeom prst="rect">
+            <a:avLst/>
+          </a:prstGeom>
+          <a:noFill/>
+          <a:ln/>
+        </p:spPr>
+        <p:txBody>
+          <a:bodyPr wrap="square" lIns="0" tIns="0" rIns="0" bIns="0" rtlCol="0" anchor="ctr"/>
+          <a:lstStyle/>
+          <a:p>
+            <a:pPr indent="0" marL="0">
+              <a:buNone/>
+            </a:pPr>
+            <a:r>
+              <a:rPr lang="en-US" sz="1100" b="1" spc="200" kern="0" dirty="0">
+                <a:solidFill>
+                  <a:srgbClr val="028090"/>
+                </a:solidFill>
+                <a:latin typeface="Malgun Gothic" pitchFamily="34" charset="0"/>
+                <a:ea typeface="Malgun Gothic" pitchFamily="34" charset="-122"/>
+                <a:cs typeface="Malgun Gothic" pitchFamily="34" charset="-120"/>
+              </a:rPr>
+              <a:t>REALTIME DEMAND</a:t>
+            </a:r>
+            <a:endParaRPr lang="en-US" sz="1100" dirty="0"/>
+          </a:p>
+        </p:txBody>
+      </p:sp>
+      <p:sp>
+        <p:nvSpPr>
+          <p:cNvPr id="3" name="Text 1"/>
+          <p:cNvSpPr/>
+          <p:nvPr/>
+        </p:nvSpPr>
+        <p:spPr>
+          <a:xfrm>
+            <a:off x="457200" y="530352"/>
+            <a:ext cx="8229600" cy="548640"/>
+          </a:xfrm>
+          <a:prstGeom prst="rect">
+            <a:avLst/>
+          </a:prstGeom>
+          <a:noFill/>
+          <a:ln/>
+        </p:spPr>
+        <p:txBody>
+          <a:bodyPr wrap="square" lIns="0" tIns="0" rIns="0" bIns="0" rtlCol="0" anchor="ctr"/>
+          <a:lstStyle/>
+          <a:p>
+            <a:pPr indent="0" marL="0">
+              <a:buNone/>
+            </a:pPr>
+            <a:r>
+              <a:rPr lang="en-US" sz="2700" b="1" dirty="0">
+                <a:solidFill>
+                  <a:srgbClr val="2B3A42"/>
+                </a:solidFill>
+                <a:latin typeface="Malgun Gothic" pitchFamily="34" charset="0"/>
+                <a:ea typeface="Malgun Gothic" pitchFamily="34" charset="-122"/>
+                <a:cs typeface="Malgun Gothic" pitchFamily="34" charset="-120"/>
+              </a:rPr>
+              <a:t>실시간 수요 발생 — 기술 &amp; 구현 (realtime.py)</a:t>
+            </a:r>
+            <a:endParaRPr lang="en-US" sz="2700" dirty="0"/>
+          </a:p>
+        </p:txBody>
+      </p:sp>
+      <p:sp>
+        <p:nvSpPr>
+          <p:cNvPr id="4" name="Shape 2"/>
+          <p:cNvSpPr/>
+          <p:nvPr/>
+        </p:nvSpPr>
+        <p:spPr>
+          <a:xfrm>
+            <a:off x="457200" y="1371600"/>
+            <a:ext cx="4114800" cy="1783080"/>
+          </a:xfrm>
+          <a:prstGeom prst="roundRect">
+            <a:avLst>
+              <a:gd name="adj" fmla="val 3590"/>
+            </a:avLst>
+          </a:prstGeom>
+          <a:solidFill>
+            <a:srgbClr val="F4F6F7"/>
+          </a:solidFill>
+          <a:ln/>
+          <a:effectLst>
+            <a:outerShdw sx="100000" sy="100000" kx="0" ky="0" algn="bl" rotWithShape="0" blurRad="63500" dist="25400" dir="2700000">
+              <a:srgbClr val="000000">
+                <a:alpha val="10000"/>
+              </a:srgbClr>
+            </a:outerShdw>
+          </a:effectLst>
+        </p:spPr>
+        <p:txBody>
+          <a:bodyPr/>
+          <a:p/>
+        </p:txBody>
+      </p:sp>
+      <p:sp>
+        <p:nvSpPr>
+          <p:cNvPr id="5" name="Text 3"/>
+          <p:cNvSpPr/>
+          <p:nvPr/>
+        </p:nvSpPr>
+        <p:spPr>
+          <a:xfrm>
+            <a:off x="640080" y="1499616"/>
+            <a:ext cx="3749040" cy="292608"/>
+          </a:xfrm>
+          <a:prstGeom prst="rect">
+            <a:avLst/>
+          </a:prstGeom>
+          <a:noFill/>
+          <a:ln/>
+        </p:spPr>
+        <p:txBody>
+          <a:bodyPr wrap="square" lIns="0" tIns="0" rIns="0" bIns="0" rtlCol="0" anchor="ctr"/>
+          <a:lstStyle/>
+          <a:p>
+            <a:pPr indent="0" marL="0">
+              <a:buNone/>
+            </a:pPr>
+            <a:r>
+              <a:rPr lang="en-US" sz="1250" b="1" dirty="0">
+                <a:solidFill>
+                  <a:srgbClr val="2B3A42"/>
+                </a:solidFill>
+                <a:latin typeface="Malgun Gothic" pitchFamily="34" charset="0"/>
+                <a:ea typeface="Malgun Gothic" pitchFamily="34" charset="-122"/>
+                <a:cs typeface="Malgun Gothic" pitchFamily="34" charset="-120"/>
+              </a:rPr>
+              <a:t>기술 스택</a:t>
+            </a:r>
+            <a:endParaRPr lang="en-US" sz="1250" dirty="0"/>
+          </a:p>
+        </p:txBody>
+      </p:sp>
+      <p:sp>
+        <p:nvSpPr>
+          <p:cNvPr id="6" name="Text 4"/>
+          <p:cNvSpPr/>
+          <p:nvPr/>
+        </p:nvSpPr>
+        <p:spPr>
+          <a:xfrm>
+            <a:off x="640080" y="1847088"/>
+            <a:ext cx="3749040" cy="1179576"/>
+          </a:xfrm>
+          <a:prstGeom prst="rect">
+            <a:avLst/>
+          </a:prstGeom>
+          <a:noFill/>
+          <a:ln/>
+        </p:spPr>
+        <p:txBody>
+          <a:bodyPr wrap="square" lIns="0" tIns="0" rIns="0" bIns="0" rtlCol="0" anchor="t"/>
+          <a:lstStyle/>
+          <a:p>
+            <a:pPr indent="0" marL="0">
+              <a:lnSpc>
+                <a:spcPct val="105000"/>
+              </a:lnSpc>
+              <a:buNone/>
+            </a:pPr>
+            <a:r>
+              <a:rPr lang="en-US" sz="1020" dirty="0">
+                <a:solidFill>
+                  <a:srgbClr val="6B7A85"/>
+                </a:solidFill>
+                <a:latin typeface="Malgun Gothic" pitchFamily="34" charset="0"/>
+                <a:ea typeface="Malgun Gothic" pitchFamily="34" charset="-122"/>
+                <a:cs typeface="Malgun Gothic" pitchFamily="34" charset="-120"/>
+              </a:rPr>
+              <a:t>FastAPI SSE(Server-Sent Events) — 단방향 서버 푸시</a:t>
+            </a:r>
+            <a:endParaRPr lang="en-US" sz="1020" dirty="0"/>
+          </a:p>
+          <a:p>
+            <a:pPr indent="0" marL="0">
+              <a:lnSpc>
+                <a:spcPct val="105000"/>
+              </a:lnSpc>
+              <a:buNone/>
+            </a:pPr>
+            <a:r>
+              <a:rPr lang="en-US" sz="1020" dirty="0">
+                <a:solidFill>
+                  <a:srgbClr val="6B7A85"/>
+                </a:solidFill>
+                <a:latin typeface="Malgun Gothic" pitchFamily="34" charset="0"/>
+                <a:ea typeface="Malgun Gothic" pitchFamily="34" charset="-122"/>
+                <a:cs typeface="Malgun Gothic" pitchFamily="34" charset="-120"/>
+              </a:rPr>
+              <a:t>· StreamingResponse(text/event-stream)로 Toast 전송</a:t>
+            </a:r>
+            <a:endParaRPr lang="en-US" sz="1020" dirty="0"/>
+          </a:p>
+          <a:p>
+            <a:pPr indent="0" marL="0">
+              <a:lnSpc>
+                <a:spcPct val="105000"/>
+              </a:lnSpc>
+              <a:buNone/>
+            </a:pPr>
+            <a:r>
+              <a:rPr lang="en-US" sz="1020" dirty="0">
+                <a:solidFill>
+                  <a:srgbClr val="6B7A85"/>
+                </a:solidFill>
+                <a:latin typeface="Malgun Gothic" pitchFamily="34" charset="0"/>
+                <a:ea typeface="Malgun Gothic" pitchFamily="34" charset="-122"/>
+                <a:cs typeface="Malgun Gothic" pitchFamily="34" charset="-120"/>
+              </a:rPr>
+              <a:t>· asyncio 백그라운드 루프 + Queue 구독자 브로드캐스트</a:t>
+            </a:r>
+            <a:endParaRPr lang="en-US" sz="1020" dirty="0"/>
+          </a:p>
+          <a:p>
+            <a:pPr indent="0" marL="0">
+              <a:lnSpc>
+                <a:spcPct val="105000"/>
+              </a:lnSpc>
+              <a:buNone/>
+            </a:pPr>
+            <a:r>
+              <a:rPr lang="en-US" sz="1020" dirty="0">
+                <a:solidFill>
+                  <a:srgbClr val="6B7A85"/>
+                </a:solidFill>
+                <a:latin typeface="Malgun Gothic" pitchFamily="34" charset="0"/>
+                <a:ea typeface="Malgun Gothic" pitchFamily="34" charset="-122"/>
+                <a:cs typeface="Malgun Gothic" pitchFamily="34" charset="-120"/>
+              </a:rPr>
+              <a:t>· SQLite 즉시 기록 · 폴링 없이 서버 푸시(EventSource)</a:t>
+            </a:r>
+            <a:endParaRPr lang="en-US" sz="1020" dirty="0"/>
+          </a:p>
+        </p:txBody>
+      </p:sp>
+      <p:sp>
+        <p:nvSpPr>
+          <p:cNvPr id="7" name="Shape 5"/>
+          <p:cNvSpPr/>
+          <p:nvPr/>
+        </p:nvSpPr>
+        <p:spPr>
+          <a:xfrm>
+            <a:off x="4572000" y="1371600"/>
+            <a:ext cx="4114800" cy="1783080"/>
+          </a:xfrm>
+          <a:prstGeom prst="roundRect">
+            <a:avLst>
+              <a:gd name="adj" fmla="val 3590"/>
+            </a:avLst>
+          </a:prstGeom>
+          <a:solidFill>
+            <a:srgbClr val="EDF5F6"/>
+          </a:solidFill>
+          <a:ln/>
+          <a:effectLst>
+            <a:outerShdw sx="100000" sy="100000" kx="0" ky="0" algn="bl" rotWithShape="0" blurRad="63500" dist="25400" dir="2700000">
+              <a:srgbClr val="000000">
+                <a:alpha val="10000"/>
+              </a:srgbClr>
+            </a:outerShdw>
+          </a:effectLst>
+        </p:spPr>
+        <p:txBody>
+          <a:bodyPr/>
+          <a:p/>
+        </p:txBody>
+      </p:sp>
+      <p:sp>
+        <p:nvSpPr>
+          <p:cNvPr id="8" name="Text 6"/>
+          <p:cNvSpPr/>
+          <p:nvPr/>
+        </p:nvSpPr>
+        <p:spPr>
+          <a:xfrm>
+            <a:off x="4754880" y="1499616"/>
+            <a:ext cx="3749040" cy="292608"/>
+          </a:xfrm>
+          <a:prstGeom prst="rect">
+            <a:avLst/>
+          </a:prstGeom>
+          <a:noFill/>
+          <a:ln/>
+        </p:spPr>
+        <p:txBody>
+          <a:bodyPr wrap="square" lIns="0" tIns="0" rIns="0" bIns="0" rtlCol="0" anchor="ctr"/>
+          <a:lstStyle/>
+          <a:p>
+            <a:pPr indent="0" marL="0">
+              <a:buNone/>
+            </a:pPr>
+            <a:r>
+              <a:rPr lang="en-US" sz="1250" b="1" dirty="0">
+                <a:solidFill>
+                  <a:srgbClr val="2B3A42"/>
+                </a:solidFill>
+                <a:latin typeface="Malgun Gothic" pitchFamily="34" charset="0"/>
+                <a:ea typeface="Malgun Gothic" pitchFamily="34" charset="-122"/>
+                <a:cs typeface="Malgun Gothic" pitchFamily="34" charset="-120"/>
+              </a:rPr>
+              <a:t>구현 흐름</a:t>
+            </a:r>
+            <a:endParaRPr lang="en-US" sz="1250" dirty="0"/>
+          </a:p>
+        </p:txBody>
+      </p:sp>
+      <p:sp>
+        <p:nvSpPr>
+          <p:cNvPr id="9" name="Text 7"/>
+          <p:cNvSpPr/>
+          <p:nvPr/>
+        </p:nvSpPr>
+        <p:spPr>
+          <a:xfrm>
+            <a:off x="4754880" y="1847088"/>
+            <a:ext cx="3749040" cy="1179576"/>
+          </a:xfrm>
+          <a:prstGeom prst="rect">
+            <a:avLst/>
+          </a:prstGeom>
+          <a:noFill/>
+          <a:ln/>
+        </p:spPr>
+        <p:txBody>
+          <a:bodyPr wrap="square" lIns="0" tIns="0" rIns="0" bIns="0" rtlCol="0" anchor="t"/>
+          <a:lstStyle/>
+          <a:p>
+            <a:pPr indent="0" marL="0">
+              <a:lnSpc>
+                <a:spcPct val="105000"/>
+              </a:lnSpc>
+              <a:buNone/>
+            </a:pPr>
+            <a:r>
+              <a:rPr lang="en-US" sz="1020" dirty="0">
+                <a:solidFill>
+                  <a:srgbClr val="6B7A85"/>
+                </a:solidFill>
+                <a:latin typeface="Malgun Gothic" pitchFamily="34" charset="0"/>
+                <a:ea typeface="Malgun Gothic" pitchFamily="34" charset="-122"/>
+                <a:cs typeface="Malgun Gothic" pitchFamily="34" charset="-120"/>
+              </a:rPr>
+              <a:t>① 가상 입·출고 생성(출고비율·수량 설정값 반영)</a:t>
+            </a:r>
+            <a:endParaRPr lang="en-US" sz="1020" dirty="0"/>
+          </a:p>
+          <a:p>
+            <a:pPr indent="0" marL="0">
+              <a:lnSpc>
+                <a:spcPct val="105000"/>
+              </a:lnSpc>
+              <a:buNone/>
+            </a:pPr>
+            <a:r>
+              <a:rPr lang="en-US" sz="1020" dirty="0">
+                <a:solidFill>
+                  <a:srgbClr val="6B7A85"/>
+                </a:solidFill>
+                <a:latin typeface="Malgun Gothic" pitchFamily="34" charset="0"/>
+                <a:ea typeface="Malgun Gothic" pitchFamily="34" charset="-122"/>
+                <a:cs typeface="Malgun Gothic" pitchFamily="34" charset="-120"/>
+              </a:rPr>
+              <a:t>② DB INSERT 먼저 → ③ 이벤트 브로드캐스트(저장→알림)</a:t>
+            </a:r>
+            <a:endParaRPr lang="en-US" sz="1020" dirty="0"/>
+          </a:p>
+          <a:p>
+            <a:pPr indent="0" marL="0">
+              <a:lnSpc>
+                <a:spcPct val="105000"/>
+              </a:lnSpc>
+              <a:buNone/>
+            </a:pPr>
+            <a:r>
+              <a:rPr lang="en-US" sz="1020" dirty="0">
+                <a:solidFill>
+                  <a:srgbClr val="6B7A85"/>
+                </a:solidFill>
+                <a:latin typeface="Malgun Gothic" pitchFamily="34" charset="0"/>
+                <a:ea typeface="Malgun Gothic" pitchFamily="34" charset="-122"/>
+                <a:cs typeface="Malgun Gothic" pitchFamily="34" charset="-120"/>
+              </a:rPr>
+              <a:t>④ /events 구독자 큐로 전달 → 프론트 Toast 표시</a:t>
+            </a:r>
+            <a:endParaRPr lang="en-US" sz="1020" dirty="0"/>
+          </a:p>
+          <a:p>
+            <a:pPr indent="0" marL="0">
+              <a:lnSpc>
+                <a:spcPct val="105000"/>
+              </a:lnSpc>
+              <a:buNone/>
+            </a:pPr>
+            <a:r>
+              <a:rPr lang="en-US" sz="1020" dirty="0">
+                <a:solidFill>
+                  <a:srgbClr val="6B7A85"/>
+                </a:solidFill>
+                <a:latin typeface="Malgun Gothic" pitchFamily="34" charset="0"/>
+                <a:ea typeface="Malgun Gothic" pitchFamily="34" charset="-122"/>
+                <a:cs typeface="Malgun Gothic" pitchFamily="34" charset="-120"/>
+              </a:rPr>
+              <a:t>⑤ 제어 API: /realtime start·stop·emit·config</a:t>
+            </a:r>
+            <a:endParaRPr lang="en-US" sz="1020" dirty="0"/>
+          </a:p>
+        </p:txBody>
+      </p:sp>
+      <p:sp>
+        <p:nvSpPr>
+          <p:cNvPr id="10" name="Text 8"/>
+          <p:cNvSpPr/>
+          <p:nvPr/>
+        </p:nvSpPr>
+        <p:spPr>
+          <a:xfrm>
+            <a:off x="457200" y="3255264"/>
+            <a:ext cx="8229600" cy="292608"/>
+          </a:xfrm>
+          <a:prstGeom prst="rect">
+            <a:avLst/>
+          </a:prstGeom>
+          <a:noFill/>
+          <a:ln/>
+        </p:spPr>
+        <p:txBody>
+          <a:bodyPr wrap="square" lIns="0" tIns="0" rIns="0" bIns="0" rtlCol="0" anchor="ctr"/>
+          <a:lstStyle/>
+          <a:p>
+            <a:pPr algn="ctr" indent="0" marL="0">
+              <a:buNone/>
+            </a:pPr>
+            <a:r>
+              <a:rPr lang="en-US" sz="1150" i="1" dirty="0">
+                <a:solidFill>
+                  <a:srgbClr val="028090"/>
+                </a:solidFill>
+                <a:latin typeface="Malgun Gothic" pitchFamily="34" charset="0"/>
+                <a:ea typeface="Malgun Gothic" pitchFamily="34" charset="-122"/>
+                <a:cs typeface="Malgun Gothic" pitchFamily="34" charset="-120"/>
+              </a:rPr>
+              <a:t>핵심: 저장→알림 순서로 조회 일관성 — Toast 시점에 LLM 조회 Tool이 즉시 인지</a:t>
+            </a:r>
+            <a:endParaRPr lang="en-US" sz="1150" dirty="0"/>
+          </a:p>
+        </p:txBody>
+      </p:sp>
+      <p:sp>
+        <p:nvSpPr>
+          <p:cNvPr id="11" name="Shape 9"/>
+          <p:cNvSpPr/>
+          <p:nvPr/>
+        </p:nvSpPr>
+        <p:spPr>
+          <a:xfrm>
+            <a:off x="457200" y="3657600"/>
+            <a:ext cx="8229600" cy="1143000"/>
+          </a:xfrm>
+          <a:prstGeom prst="roundRect">
+            <a:avLst>
+              <a:gd name="adj" fmla="val 6400"/>
+            </a:avLst>
+          </a:prstGeom>
+          <a:solidFill>
+            <a:srgbClr val="263238"/>
+          </a:solidFill>
+          <a:ln/>
+        </p:spPr>
+        <p:txBody>
+          <a:bodyPr/>
+          <a:p/>
+        </p:txBody>
+      </p:sp>
+      <p:sp>
+        <p:nvSpPr>
+          <p:cNvPr id="12" name="Text 10"/>
+          <p:cNvSpPr/>
+          <p:nvPr/>
+        </p:nvSpPr>
+        <p:spPr>
+          <a:xfrm>
+            <a:off x="685800" y="3767328"/>
+            <a:ext cx="7772400" cy="274320"/>
+          </a:xfrm>
+          <a:prstGeom prst="rect">
+            <a:avLst/>
+          </a:prstGeom>
+          <a:noFill/>
+          <a:ln/>
+        </p:spPr>
+        <p:txBody>
+          <a:bodyPr wrap="square" lIns="0" tIns="0" rIns="0" bIns="0" rtlCol="0" anchor="ctr"/>
+          <a:lstStyle/>
+          <a:p>
+            <a:pPr indent="0" marL="0">
+              <a:buNone/>
+            </a:pPr>
+            <a:r>
+              <a:rPr lang="en-US" sz="1250" b="1" dirty="0">
+                <a:solidFill>
+                  <a:srgbClr val="7FD1CD"/>
+                </a:solidFill>
+                <a:latin typeface="Malgun Gothic" pitchFamily="34" charset="0"/>
+                <a:ea typeface="Malgun Gothic" pitchFamily="34" charset="-122"/>
+                <a:cs typeface="Malgun Gothic" pitchFamily="34" charset="-120"/>
+              </a:rPr>
+              <a:t>설정(⚙ 모달) · 실시간 인지 · 무폴링</a:t>
+            </a:r>
+            <a:endParaRPr lang="en-US" sz="1250" dirty="0"/>
+          </a:p>
+        </p:txBody>
+      </p:sp>
+      <p:sp>
+        <p:nvSpPr>
+          <p:cNvPr id="13" name="Text 11"/>
+          <p:cNvSpPr/>
+          <p:nvPr/>
+        </p:nvSpPr>
+        <p:spPr>
+          <a:xfrm>
+            <a:off x="685800" y="4133088"/>
+            <a:ext cx="7772400" cy="594360"/>
+          </a:xfrm>
+          <a:prstGeom prst="rect">
+            <a:avLst/>
+          </a:prstGeom>
+          <a:noFill/>
+          <a:ln/>
+        </p:spPr>
+        <p:txBody>
+          <a:bodyPr wrap="square" lIns="0" tIns="0" rIns="0" bIns="0" rtlCol="0" anchor="t"/>
+          <a:lstStyle/>
+          <a:p>
+            <a:pPr indent="0" marL="0">
+              <a:lnSpc>
+                <a:spcPct val="105000"/>
+              </a:lnSpc>
+              <a:buNone/>
+            </a:pPr>
+            <a:r>
+              <a:rPr lang="en-US" sz="1100" b="1" dirty="0">
+                <a:solidFill>
+                  <a:srgbClr val="FFFFFF"/>
+                </a:solidFill>
+                <a:latin typeface="Malgun Gothic" pitchFamily="34" charset="0"/>
+                <a:ea typeface="Malgun Gothic" pitchFamily="34" charset="-122"/>
+                <a:cs typeface="Malgun Gothic" pitchFamily="34" charset="-120"/>
+              </a:rPr>
+              <a:t xml:space="preserve">생성주기 </a:t>
+            </a:r>
+            <a:pPr indent="0" marL="0">
+              <a:lnSpc>
+                <a:spcPct val="105000"/>
+              </a:lnSpc>
+              <a:buNone/>
+            </a:pPr>
+            <a:r>
+              <a:rPr lang="en-US" sz="1100" dirty="0">
+                <a:solidFill>
+                  <a:srgbClr val="CFD8DC"/>
+                </a:solidFill>
+                <a:latin typeface="Malgun Gothic" pitchFamily="34" charset="0"/>
+                <a:ea typeface="Malgun Gothic" pitchFamily="34" charset="-122"/>
+                <a:cs typeface="Malgun Gothic" pitchFamily="34" charset="-120"/>
+              </a:rPr>
+              <a:t xml:space="preserve">2초~ 가변      </a:t>
+            </a:r>
+            <a:pPr indent="0" marL="0">
+              <a:lnSpc>
+                <a:spcPct val="105000"/>
+              </a:lnSpc>
+              <a:buNone/>
+            </a:pPr>
+            <a:r>
+              <a:rPr lang="en-US" sz="1100" b="1" dirty="0">
+                <a:solidFill>
+                  <a:srgbClr val="FFFFFF"/>
+                </a:solidFill>
+                <a:latin typeface="Malgun Gothic" pitchFamily="34" charset="0"/>
+                <a:ea typeface="Malgun Gothic" pitchFamily="34" charset="-122"/>
+                <a:cs typeface="Malgun Gothic" pitchFamily="34" charset="-120"/>
+              </a:rPr>
+              <a:t xml:space="preserve">출고비율 </a:t>
+            </a:r>
+            <a:pPr indent="0" marL="0">
+              <a:lnSpc>
+                <a:spcPct val="105000"/>
+              </a:lnSpc>
+              <a:buNone/>
+            </a:pPr>
+            <a:r>
+              <a:rPr lang="en-US" sz="1100" dirty="0">
+                <a:solidFill>
+                  <a:srgbClr val="CFD8DC"/>
+                </a:solidFill>
+                <a:latin typeface="Malgun Gothic" pitchFamily="34" charset="0"/>
+                <a:ea typeface="Malgun Gothic" pitchFamily="34" charset="-122"/>
+                <a:cs typeface="Malgun Gothic" pitchFamily="34" charset="-120"/>
+              </a:rPr>
+              <a:t xml:space="preserve">출고:입고 비중      </a:t>
+            </a:r>
+            <a:pPr indent="0" marL="0">
+              <a:lnSpc>
+                <a:spcPct val="105000"/>
+              </a:lnSpc>
+              <a:buNone/>
+            </a:pPr>
+            <a:r>
+              <a:rPr lang="en-US" sz="1100" b="1" dirty="0">
+                <a:solidFill>
+                  <a:srgbClr val="FFFFFF"/>
+                </a:solidFill>
+                <a:latin typeface="Malgun Gothic" pitchFamily="34" charset="0"/>
+                <a:ea typeface="Malgun Gothic" pitchFamily="34" charset="-122"/>
+                <a:cs typeface="Malgun Gothic" pitchFamily="34" charset="-120"/>
+              </a:rPr>
+              <a:t xml:space="preserve">수량범위 </a:t>
+            </a:r>
+            <a:pPr indent="0" marL="0">
+              <a:lnSpc>
+                <a:spcPct val="105000"/>
+              </a:lnSpc>
+              <a:buNone/>
+            </a:pPr>
+            <a:r>
+              <a:rPr lang="en-US" sz="1100" dirty="0">
+                <a:solidFill>
+                  <a:srgbClr val="CFD8DC"/>
+                </a:solidFill>
+                <a:latin typeface="Malgun Gothic" pitchFamily="34" charset="0"/>
+                <a:ea typeface="Malgun Gothic" pitchFamily="34" charset="-122"/>
+                <a:cs typeface="Malgun Gothic" pitchFamily="34" charset="-120"/>
+              </a:rPr>
+              <a:t>입·출고 min~max</a:t>
+            </a:r>
+            <a:endParaRPr lang="en-US" sz="1100" dirty="0"/>
+          </a:p>
+          <a:p>
+            <a:pPr indent="0" marL="0">
+              <a:lnSpc>
+                <a:spcPct val="105000"/>
+              </a:lnSpc>
+              <a:buNone/>
+            </a:pPr>
+            <a:r>
+              <a:rPr lang="en-US" sz="1100" i="1" dirty="0">
+                <a:solidFill>
+                  <a:srgbClr val="9FC7C4"/>
+                </a:solidFill>
+                <a:latin typeface="Malgun Gothic" pitchFamily="34" charset="0"/>
+                <a:ea typeface="Malgun Gothic" pitchFamily="34" charset="-122"/>
+                <a:cs typeface="Malgun Gothic" pitchFamily="34" charset="-120"/>
+              </a:rPr>
+              <a:t>→ 설정 모달에서 주기·출고비율·수량을 즉시 변경, 다음 주기부터 반영</a:t>
+            </a:r>
+            <a:endParaRPr lang="en-US" sz="1100" dirty="0"/>
+          </a:p>
+        </p:txBody>
+      </p:sp>
+    </p:spTree>
+  </p:cSld>
+  <p:clrMapOvr>
+    <a:masterClrMapping/>
+  </p:clrMapOvr>
+</p:sld>
+</file>
+
+<file path=ppt/slides/slide22.xml><?xml version="1.0" encoding="utf-8"?>
+<p:sld xmlns:a="http://schemas.openxmlformats.org/drawingml/2006/main" xmlns:r="http://schemas.openxmlformats.org/officeDocument/2006/relationships" xmlns:p="http://schemas.openxmlformats.org/presentationml/2006/main">
+  <p:cSld name="Slide 14">
+    <p:bg>
+      <p:bgPr>
+        <a:solidFill>
+          <a:srgbClr val="FFFFFF"/>
+        </a:solidFill>
+      </p:bgPr>
+    </p:bg>
+    <p:spTree>
+      <p:nvGrpSpPr>
+        <p:cNvPr id="1" name=""/>
+        <p:cNvGrpSpPr/>
+        <p:nvPr/>
+      </p:nvGrpSpPr>
+      <p:grpSpPr>
+        <a:xfrm>
+          <a:off x="0" y="0"/>
+          <a:ext cx="0" cy="0"/>
+          <a:chOff x="0" y="0"/>
+          <a:chExt cx="0" cy="0"/>
+        </a:xfrm>
+      </p:grpSpPr>
+      <p:sp>
+        <p:nvSpPr>
+          <p:cNvPr id="2" name="Text 0"/>
+          <p:cNvSpPr/>
+          <p:nvPr/>
+        </p:nvSpPr>
+        <p:spPr>
+          <a:xfrm>
+            <a:off x="457200" y="292608"/>
+            <a:ext cx="8229600" cy="274320"/>
+          </a:xfrm>
+          <a:prstGeom prst="rect">
+            <a:avLst/>
+          </a:prstGeom>
+          <a:noFill/>
+          <a:ln/>
+        </p:spPr>
+        <p:txBody>
+          <a:bodyPr wrap="square" lIns="0" tIns="0" rIns="0" bIns="0" rtlCol="0" anchor="ctr"/>
+          <a:lstStyle/>
+          <a:p>
+            <a:pPr indent="0" marL="0">
+              <a:buNone/>
+            </a:pPr>
+            <a:r>
+              <a:rPr lang="en-US" sz="1100" b="1" spc="200" kern="0" dirty="0">
+                <a:solidFill>
+                  <a:srgbClr val="028090"/>
+                </a:solidFill>
+                <a:latin typeface="Malgun Gothic" pitchFamily="34" charset="0"/>
+                <a:ea typeface="Malgun Gothic" pitchFamily="34" charset="-122"/>
+                <a:cs typeface="Malgun Gothic" pitchFamily="34" charset="-120"/>
+              </a:rPr>
+              <a:t>CONVERSATION MEMORY</a:t>
+            </a:r>
+            <a:endParaRPr lang="en-US" sz="1100" dirty="0"/>
+          </a:p>
+        </p:txBody>
+      </p:sp>
+      <p:sp>
+        <p:nvSpPr>
+          <p:cNvPr id="3" name="Text 1"/>
+          <p:cNvSpPr/>
+          <p:nvPr/>
+        </p:nvSpPr>
+        <p:spPr>
+          <a:xfrm>
+            <a:off x="457200" y="530352"/>
+            <a:ext cx="8229600" cy="548640"/>
+          </a:xfrm>
+          <a:prstGeom prst="rect">
+            <a:avLst/>
+          </a:prstGeom>
+          <a:noFill/>
+          <a:ln/>
+        </p:spPr>
+        <p:txBody>
+          <a:bodyPr wrap="square" lIns="0" tIns="0" rIns="0" bIns="0" rtlCol="0" anchor="ctr"/>
+          <a:lstStyle/>
+          <a:p>
+            <a:pPr indent="0" marL="0">
+              <a:buNone/>
+            </a:pPr>
+            <a:r>
+              <a:rPr lang="en-US" sz="2700" b="1" dirty="0">
+                <a:solidFill>
+                  <a:srgbClr val="2B3A42"/>
+                </a:solidFill>
+                <a:latin typeface="Malgun Gothic" pitchFamily="34" charset="0"/>
+                <a:ea typeface="Malgun Gothic" pitchFamily="34" charset="-122"/>
+                <a:cs typeface="Malgun Gothic" pitchFamily="34" charset="-120"/>
+              </a:rPr>
+              <a:t>대화 메모리 — 기술 &amp; 구현 (chat_store.py · LangGraph)</a:t>
+            </a:r>
+            <a:endParaRPr lang="en-US" sz="2700" dirty="0"/>
+          </a:p>
+        </p:txBody>
+      </p:sp>
+      <p:sp>
+        <p:nvSpPr>
+          <p:cNvPr id="4" name="Shape 2"/>
+          <p:cNvSpPr/>
+          <p:nvPr/>
+        </p:nvSpPr>
+        <p:spPr>
+          <a:xfrm>
+            <a:off x="457200" y="1371600"/>
+            <a:ext cx="4114800" cy="1783080"/>
+          </a:xfrm>
+          <a:prstGeom prst="roundRect">
+            <a:avLst>
+              <a:gd name="adj" fmla="val 3590"/>
+            </a:avLst>
+          </a:prstGeom>
+          <a:solidFill>
+            <a:srgbClr val="F4F6F7"/>
+          </a:solidFill>
+          <a:ln/>
+          <a:effectLst>
+            <a:outerShdw sx="100000" sy="100000" kx="0" ky="0" algn="bl" rotWithShape="0" blurRad="63500" dist="25400" dir="2700000">
+              <a:srgbClr val="000000">
+                <a:alpha val="10000"/>
+              </a:srgbClr>
+            </a:outerShdw>
+          </a:effectLst>
+        </p:spPr>
+        <p:txBody>
+          <a:bodyPr/>
+          <a:p/>
+        </p:txBody>
+      </p:sp>
+      <p:sp>
+        <p:nvSpPr>
+          <p:cNvPr id="5" name="Text 3"/>
+          <p:cNvSpPr/>
+          <p:nvPr/>
+        </p:nvSpPr>
+        <p:spPr>
+          <a:xfrm>
+            <a:off x="640080" y="1499616"/>
+            <a:ext cx="3749040" cy="292608"/>
+          </a:xfrm>
+          <a:prstGeom prst="rect">
+            <a:avLst/>
+          </a:prstGeom>
+          <a:noFill/>
+          <a:ln/>
+        </p:spPr>
+        <p:txBody>
+          <a:bodyPr wrap="square" lIns="0" tIns="0" rIns="0" bIns="0" rtlCol="0" anchor="ctr"/>
+          <a:lstStyle/>
+          <a:p>
+            <a:pPr indent="0" marL="0">
+              <a:buNone/>
+            </a:pPr>
+            <a:r>
+              <a:rPr lang="en-US" sz="1250" b="1" dirty="0">
+                <a:solidFill>
+                  <a:srgbClr val="2B3A42"/>
+                </a:solidFill>
+                <a:latin typeface="Malgun Gothic" pitchFamily="34" charset="0"/>
+                <a:ea typeface="Malgun Gothic" pitchFamily="34" charset="-122"/>
+                <a:cs typeface="Malgun Gothic" pitchFamily="34" charset="-120"/>
+              </a:rPr>
+              <a:t>계층 A — 영속화 (저장·복원)</a:t>
+            </a:r>
+            <a:endParaRPr lang="en-US" sz="1250" dirty="0"/>
+          </a:p>
+        </p:txBody>
+      </p:sp>
+      <p:sp>
+        <p:nvSpPr>
+          <p:cNvPr id="6" name="Text 4"/>
+          <p:cNvSpPr/>
+          <p:nvPr/>
+        </p:nvSpPr>
+        <p:spPr>
+          <a:xfrm>
+            <a:off x="640080" y="1847088"/>
+            <a:ext cx="3749040" cy="1179576"/>
+          </a:xfrm>
+          <a:prstGeom prst="rect">
+            <a:avLst/>
+          </a:prstGeom>
+          <a:noFill/>
+          <a:ln/>
+        </p:spPr>
+        <p:txBody>
+          <a:bodyPr wrap="square" lIns="0" tIns="0" rIns="0" bIns="0" rtlCol="0" anchor="t"/>
+          <a:lstStyle/>
+          <a:p>
+            <a:pPr indent="0" marL="0">
+              <a:lnSpc>
+                <a:spcPct val="105000"/>
+              </a:lnSpc>
+              <a:buNone/>
+            </a:pPr>
+            <a:r>
+              <a:rPr lang="en-US" sz="1020" dirty="0">
+                <a:solidFill>
+                  <a:srgbClr val="6B7A85"/>
+                </a:solidFill>
+                <a:latin typeface="Malgun Gothic" pitchFamily="34" charset="0"/>
+                <a:ea typeface="Malgun Gothic" pitchFamily="34" charset="-122"/>
+                <a:cs typeface="Malgun Gothic" pitchFamily="34" charset="-120"/>
+              </a:rPr>
+              <a:t>SQLite chat_sessions / chat_messages</a:t>
+            </a:r>
+            <a:endParaRPr lang="en-US" sz="1020" dirty="0"/>
+          </a:p>
+          <a:p>
+            <a:pPr indent="0" marL="0">
+              <a:lnSpc>
+                <a:spcPct val="105000"/>
+              </a:lnSpc>
+              <a:buNone/>
+            </a:pPr>
+            <a:r>
+              <a:rPr lang="en-US" sz="1020" dirty="0">
+                <a:solidFill>
+                  <a:srgbClr val="6B7A85"/>
+                </a:solidFill>
+                <a:latin typeface="Malgun Gothic" pitchFamily="34" charset="0"/>
+                <a:ea typeface="Malgun Gothic" pitchFamily="34" charset="-122"/>
+                <a:cs typeface="Malgun Gothic" pitchFamily="34" charset="-120"/>
+              </a:rPr>
+              <a:t>· 세션 생성 · 메시지 append · 제목 자동 생성</a:t>
+            </a:r>
+            <a:endParaRPr lang="en-US" sz="1020" dirty="0"/>
+          </a:p>
+          <a:p>
+            <a:pPr indent="0" marL="0">
+              <a:lnSpc>
+                <a:spcPct val="105000"/>
+              </a:lnSpc>
+              <a:buNone/>
+            </a:pPr>
+            <a:r>
+              <a:rPr lang="en-US" sz="1020" dirty="0">
+                <a:solidFill>
+                  <a:srgbClr val="6B7A85"/>
+                </a:solidFill>
+                <a:latin typeface="Malgun Gothic" pitchFamily="34" charset="0"/>
+                <a:ea typeface="Malgun Gothic" pitchFamily="34" charset="-122"/>
+                <a:cs typeface="Malgun Gothic" pitchFamily="34" charset="-120"/>
+              </a:rPr>
+              <a:t>· /sessions 목록·복원·삭제 · 서버 DB 저장</a:t>
+            </a:r>
+            <a:endParaRPr lang="en-US" sz="1020" dirty="0"/>
+          </a:p>
+          <a:p>
+            <a:pPr indent="0" marL="0">
+              <a:lnSpc>
+                <a:spcPct val="105000"/>
+              </a:lnSpc>
+              <a:buNone/>
+            </a:pPr>
+            <a:r>
+              <a:rPr lang="en-US" sz="1020" dirty="0">
+                <a:solidFill>
+                  <a:srgbClr val="6B7A85"/>
+                </a:solidFill>
+                <a:latin typeface="Malgun Gothic" pitchFamily="34" charset="0"/>
+                <a:ea typeface="Malgun Gothic" pitchFamily="34" charset="-122"/>
+                <a:cs typeface="Malgun Gothic" pitchFamily="34" charset="-120"/>
+              </a:rPr>
+              <a:t>· 사이드바 세션 목록·검색·복원 · 화자 라벨(user/ai)</a:t>
+            </a:r>
+            <a:endParaRPr lang="en-US" sz="1020" dirty="0"/>
+          </a:p>
+        </p:txBody>
+      </p:sp>
+      <p:sp>
+        <p:nvSpPr>
+          <p:cNvPr id="7" name="Shape 5"/>
+          <p:cNvSpPr/>
+          <p:nvPr/>
+        </p:nvSpPr>
+        <p:spPr>
+          <a:xfrm>
+            <a:off x="4572000" y="1371600"/>
+            <a:ext cx="4114800" cy="1783080"/>
+          </a:xfrm>
+          <a:prstGeom prst="roundRect">
+            <a:avLst>
+              <a:gd name="adj" fmla="val 3590"/>
+            </a:avLst>
+          </a:prstGeom>
+          <a:solidFill>
+            <a:srgbClr val="EDF5F6"/>
+          </a:solidFill>
+          <a:ln/>
+          <a:effectLst>
+            <a:outerShdw sx="100000" sy="100000" kx="0" ky="0" algn="bl" rotWithShape="0" blurRad="63500" dist="25400" dir="2700000">
+              <a:srgbClr val="000000">
+                <a:alpha val="10000"/>
+              </a:srgbClr>
+            </a:outerShdw>
+          </a:effectLst>
+        </p:spPr>
+        <p:txBody>
+          <a:bodyPr/>
+          <a:p/>
+        </p:txBody>
+      </p:sp>
+      <p:sp>
+        <p:nvSpPr>
+          <p:cNvPr id="8" name="Text 6"/>
+          <p:cNvSpPr/>
+          <p:nvPr/>
+        </p:nvSpPr>
+        <p:spPr>
+          <a:xfrm>
+            <a:off x="4754880" y="1499616"/>
+            <a:ext cx="3749040" cy="292608"/>
+          </a:xfrm>
+          <a:prstGeom prst="rect">
+            <a:avLst/>
+          </a:prstGeom>
+          <a:noFill/>
+          <a:ln/>
+        </p:spPr>
+        <p:txBody>
+          <a:bodyPr wrap="square" lIns="0" tIns="0" rIns="0" bIns="0" rtlCol="0" anchor="ctr"/>
+          <a:lstStyle/>
+          <a:p>
+            <a:pPr indent="0" marL="0">
+              <a:buNone/>
+            </a:pPr>
+            <a:r>
+              <a:rPr lang="en-US" sz="1250" b="1" dirty="0">
+                <a:solidFill>
+                  <a:srgbClr val="2B3A42"/>
+                </a:solidFill>
+                <a:latin typeface="Malgun Gothic" pitchFamily="34" charset="0"/>
+                <a:ea typeface="Malgun Gothic" pitchFamily="34" charset="-122"/>
+                <a:cs typeface="Malgun Gothic" pitchFamily="34" charset="-120"/>
+              </a:rPr>
+              <a:t>계층 B — 멀티턴 맥락</a:t>
+            </a:r>
+            <a:endParaRPr lang="en-US" sz="1250" dirty="0"/>
+          </a:p>
+        </p:txBody>
+      </p:sp>
+      <p:sp>
+        <p:nvSpPr>
+          <p:cNvPr id="9" name="Text 7"/>
+          <p:cNvSpPr/>
+          <p:nvPr/>
+        </p:nvSpPr>
+        <p:spPr>
+          <a:xfrm>
+            <a:off x="4754880" y="1847088"/>
+            <a:ext cx="3749040" cy="1179576"/>
+          </a:xfrm>
+          <a:prstGeom prst="rect">
+            <a:avLst/>
+          </a:prstGeom>
+          <a:noFill/>
+          <a:ln/>
+        </p:spPr>
+        <p:txBody>
+          <a:bodyPr wrap="square" lIns="0" tIns="0" rIns="0" bIns="0" rtlCol="0" anchor="t"/>
+          <a:lstStyle/>
+          <a:p>
+            <a:pPr indent="0" marL="0">
+              <a:lnSpc>
+                <a:spcPct val="105000"/>
+              </a:lnSpc>
+              <a:buNone/>
+            </a:pPr>
+            <a:r>
+              <a:rPr lang="en-US" sz="1020" dirty="0">
+                <a:solidFill>
+                  <a:srgbClr val="6B7A85"/>
+                </a:solidFill>
+                <a:latin typeface="Malgun Gothic" pitchFamily="34" charset="0"/>
+                <a:ea typeface="Malgun Gothic" pitchFamily="34" charset="-122"/>
+                <a:cs typeface="Malgun Gothic" pitchFamily="34" charset="-120"/>
+              </a:rPr>
+              <a:t>“직전 맥락 기억” — 최근 6턴 주입</a:t>
+            </a:r>
+            <a:endParaRPr lang="en-US" sz="1020" dirty="0"/>
+          </a:p>
+          <a:p>
+            <a:pPr indent="0" marL="0">
+              <a:lnSpc>
+                <a:spcPct val="105000"/>
+              </a:lnSpc>
+              <a:buNone/>
+            </a:pPr>
+            <a:r>
+              <a:rPr lang="en-US" sz="1020" dirty="0">
+                <a:solidFill>
+                  <a:srgbClr val="6B7A85"/>
+                </a:solidFill>
+                <a:latin typeface="Malgun Gothic" pitchFamily="34" charset="0"/>
+                <a:ea typeface="Malgun Gothic" pitchFamily="34" charset="-122"/>
+                <a:cs typeface="Malgun Gothic" pitchFamily="34" charset="-120"/>
+              </a:rPr>
+              <a:t>· /chat이 session_id로 recent_history → state.history</a:t>
+            </a:r>
+            <a:endParaRPr lang="en-US" sz="1020" dirty="0"/>
+          </a:p>
+          <a:p>
+            <a:pPr indent="0" marL="0">
+              <a:lnSpc>
+                <a:spcPct val="105000"/>
+              </a:lnSpc>
+              <a:buNone/>
+            </a:pPr>
+            <a:r>
+              <a:rPr lang="en-US" sz="1020" dirty="0">
+                <a:solidFill>
+                  <a:srgbClr val="6B7A85"/>
+                </a:solidFill>
+                <a:latin typeface="Malgun Gothic" pitchFamily="34" charset="0"/>
+                <a:ea typeface="Malgun Gothic" pitchFamily="34" charset="-122"/>
+                <a:cs typeface="Malgun Gothic" pitchFamily="34" charset="-120"/>
+              </a:rPr>
+              <a:t>· Router 대명사·생략 해소(‘그거 할당’→직전 order_no)</a:t>
+            </a:r>
+            <a:endParaRPr lang="en-US" sz="1020" dirty="0"/>
+          </a:p>
+          <a:p>
+            <a:pPr indent="0" marL="0">
+              <a:lnSpc>
+                <a:spcPct val="105000"/>
+              </a:lnSpc>
+              <a:buNone/>
+            </a:pPr>
+            <a:r>
+              <a:rPr lang="en-US" sz="1020" dirty="0">
+                <a:solidFill>
+                  <a:srgbClr val="6B7A85"/>
+                </a:solidFill>
+                <a:latin typeface="Malgun Gothic" pitchFamily="34" charset="0"/>
+                <a:ea typeface="Malgun Gothic" pitchFamily="34" charset="-122"/>
+                <a:cs typeface="Malgun Gothic" pitchFamily="34" charset="-120"/>
+              </a:rPr>
+              <a:t>· Response Generator가 맥락 이어받아 일관 응답</a:t>
+            </a:r>
+            <a:endParaRPr lang="en-US" sz="1020" dirty="0"/>
+          </a:p>
+        </p:txBody>
+      </p:sp>
+      <p:sp>
+        <p:nvSpPr>
+          <p:cNvPr id="10" name="Text 8"/>
+          <p:cNvSpPr/>
+          <p:nvPr/>
+        </p:nvSpPr>
+        <p:spPr>
+          <a:xfrm>
+            <a:off x="457200" y="3255264"/>
+            <a:ext cx="8229600" cy="292608"/>
+          </a:xfrm>
+          <a:prstGeom prst="rect">
+            <a:avLst/>
+          </a:prstGeom>
+          <a:noFill/>
+          <a:ln/>
+        </p:spPr>
+        <p:txBody>
+          <a:bodyPr wrap="square" lIns="0" tIns="0" rIns="0" bIns="0" rtlCol="0" anchor="ctr"/>
+          <a:lstStyle/>
+          <a:p>
+            <a:pPr algn="ctr" indent="0" marL="0">
+              <a:buNone/>
+            </a:pPr>
+            <a:r>
+              <a:rPr lang="en-US" sz="1150" i="1" dirty="0">
+                <a:solidFill>
+                  <a:srgbClr val="028090"/>
+                </a:solidFill>
+                <a:latin typeface="Malgun Gothic" pitchFamily="34" charset="0"/>
+                <a:ea typeface="Malgun Gothic" pitchFamily="34" charset="-122"/>
+                <a:cs typeface="Malgun Gothic" pitchFamily="34" charset="-120"/>
+              </a:rPr>
+              <a:t>핵심: smalltalk 인텐트 — 인사·이름·‘기억해둬’를 history로 응답(고정 문구 제거)</a:t>
+            </a:r>
+            <a:endParaRPr lang="en-US" sz="1150" dirty="0"/>
+          </a:p>
+        </p:txBody>
+      </p:sp>
+      <p:sp>
+        <p:nvSpPr>
+          <p:cNvPr id="11" name="Shape 9"/>
+          <p:cNvSpPr/>
+          <p:nvPr/>
+        </p:nvSpPr>
+        <p:spPr>
+          <a:xfrm>
+            <a:off x="457200" y="3657600"/>
+            <a:ext cx="8229600" cy="1143000"/>
+          </a:xfrm>
+          <a:prstGeom prst="roundRect">
+            <a:avLst>
+              <a:gd name="adj" fmla="val 6400"/>
+            </a:avLst>
+          </a:prstGeom>
+          <a:solidFill>
+            <a:srgbClr val="263238"/>
+          </a:solidFill>
+          <a:ln/>
+        </p:spPr>
+        <p:txBody>
+          <a:bodyPr/>
+          <a:p/>
+        </p:txBody>
+      </p:sp>
+      <p:sp>
+        <p:nvSpPr>
+          <p:cNvPr id="12" name="Text 10"/>
+          <p:cNvSpPr/>
+          <p:nvPr/>
+        </p:nvSpPr>
+        <p:spPr>
+          <a:xfrm>
+            <a:off x="685800" y="3767328"/>
+            <a:ext cx="7772400" cy="274320"/>
+          </a:xfrm>
+          <a:prstGeom prst="rect">
+            <a:avLst/>
+          </a:prstGeom>
+          <a:noFill/>
+          <a:ln/>
+        </p:spPr>
+        <p:txBody>
+          <a:bodyPr wrap="square" lIns="0" tIns="0" rIns="0" bIns="0" rtlCol="0" anchor="ctr"/>
+          <a:lstStyle/>
+          <a:p>
+            <a:pPr indent="0" marL="0">
+              <a:buNone/>
+            </a:pPr>
+            <a:r>
+              <a:rPr lang="en-US" sz="1250" b="1" dirty="0">
+                <a:solidFill>
+                  <a:srgbClr val="7FD1CD"/>
+                </a:solidFill>
+                <a:latin typeface="Malgun Gothic" pitchFamily="34" charset="0"/>
+                <a:ea typeface="Malgun Gothic" pitchFamily="34" charset="-122"/>
+                <a:cs typeface="Malgun Gothic" pitchFamily="34" charset="-120"/>
+              </a:rPr>
+              <a:t>저장 · 맥락 · 모델</a:t>
+            </a:r>
+            <a:endParaRPr lang="en-US" sz="1250" dirty="0"/>
+          </a:p>
+        </p:txBody>
+      </p:sp>
+      <p:sp>
+        <p:nvSpPr>
+          <p:cNvPr id="13" name="Text 11"/>
+          <p:cNvSpPr/>
+          <p:nvPr/>
+        </p:nvSpPr>
+        <p:spPr>
+          <a:xfrm>
+            <a:off x="685800" y="4133088"/>
+            <a:ext cx="7772400" cy="594360"/>
+          </a:xfrm>
+          <a:prstGeom prst="rect">
+            <a:avLst/>
+          </a:prstGeom>
+          <a:noFill/>
+          <a:ln/>
+        </p:spPr>
+        <p:txBody>
+          <a:bodyPr wrap="square" lIns="0" tIns="0" rIns="0" bIns="0" rtlCol="0" anchor="t"/>
+          <a:lstStyle/>
+          <a:p>
+            <a:pPr indent="0" marL="0">
+              <a:lnSpc>
+                <a:spcPct val="105000"/>
+              </a:lnSpc>
+              <a:buNone/>
+            </a:pPr>
+            <a:r>
+              <a:rPr lang="en-US" sz="1100" b="1" dirty="0">
+                <a:solidFill>
+                  <a:srgbClr val="FFFFFF"/>
+                </a:solidFill>
+                <a:latin typeface="Malgun Gothic" pitchFamily="34" charset="0"/>
+                <a:ea typeface="Malgun Gothic" pitchFamily="34" charset="-122"/>
+                <a:cs typeface="Malgun Gothic" pitchFamily="34" charset="-120"/>
+              </a:rPr>
+              <a:t xml:space="preserve">저장 </a:t>
+            </a:r>
+            <a:pPr indent="0" marL="0">
+              <a:lnSpc>
+                <a:spcPct val="105000"/>
+              </a:lnSpc>
+              <a:buNone/>
+            </a:pPr>
+            <a:r>
+              <a:rPr lang="en-US" sz="1100" dirty="0">
+                <a:solidFill>
+                  <a:srgbClr val="CFD8DC"/>
+                </a:solidFill>
+                <a:latin typeface="Malgun Gothic" pitchFamily="34" charset="0"/>
+                <a:ea typeface="Malgun Gothic" pitchFamily="34" charset="-122"/>
+                <a:cs typeface="Malgun Gothic" pitchFamily="34" charset="-120"/>
+              </a:rPr>
+              <a:t xml:space="preserve">SQLite 서버 DB      </a:t>
+            </a:r>
+            <a:pPr indent="0" marL="0">
+              <a:lnSpc>
+                <a:spcPct val="105000"/>
+              </a:lnSpc>
+              <a:buNone/>
+            </a:pPr>
+            <a:r>
+              <a:rPr lang="en-US" sz="1100" b="1" dirty="0">
+                <a:solidFill>
+                  <a:srgbClr val="FFFFFF"/>
+                </a:solidFill>
+                <a:latin typeface="Malgun Gothic" pitchFamily="34" charset="0"/>
+                <a:ea typeface="Malgun Gothic" pitchFamily="34" charset="-122"/>
+                <a:cs typeface="Malgun Gothic" pitchFamily="34" charset="-120"/>
+              </a:rPr>
+              <a:t xml:space="preserve">맥락 </a:t>
+            </a:r>
+            <a:pPr indent="0" marL="0">
+              <a:lnSpc>
+                <a:spcPct val="105000"/>
+              </a:lnSpc>
+              <a:buNone/>
+            </a:pPr>
+            <a:r>
+              <a:rPr lang="en-US" sz="1100" dirty="0">
+                <a:solidFill>
+                  <a:srgbClr val="CFD8DC"/>
+                </a:solidFill>
+                <a:latin typeface="Malgun Gothic" pitchFamily="34" charset="0"/>
+                <a:ea typeface="Malgun Gothic" pitchFamily="34" charset="-122"/>
+                <a:cs typeface="Malgun Gothic" pitchFamily="34" charset="-120"/>
+              </a:rPr>
+              <a:t xml:space="preserve">LangGraph state.history      </a:t>
+            </a:r>
+            <a:pPr indent="0" marL="0">
+              <a:lnSpc>
+                <a:spcPct val="105000"/>
+              </a:lnSpc>
+              <a:buNone/>
+            </a:pPr>
+            <a:r>
+              <a:rPr lang="en-US" sz="1100" b="1" dirty="0">
+                <a:solidFill>
+                  <a:srgbClr val="FFFFFF"/>
+                </a:solidFill>
+                <a:latin typeface="Malgun Gothic" pitchFamily="34" charset="0"/>
+                <a:ea typeface="Malgun Gothic" pitchFamily="34" charset="-122"/>
+                <a:cs typeface="Malgun Gothic" pitchFamily="34" charset="-120"/>
+              </a:rPr>
+              <a:t xml:space="preserve">모델 </a:t>
+            </a:r>
+            <a:pPr indent="0" marL="0">
+              <a:lnSpc>
+                <a:spcPct val="105000"/>
+              </a:lnSpc>
+              <a:buNone/>
+            </a:pPr>
+            <a:r>
+              <a:rPr lang="en-US" sz="1100" dirty="0">
+                <a:solidFill>
+                  <a:srgbClr val="CFD8DC"/>
+                </a:solidFill>
+                <a:latin typeface="Malgun Gothic" pitchFamily="34" charset="0"/>
+                <a:ea typeface="Malgun Gothic" pitchFamily="34" charset="-122"/>
+                <a:cs typeface="Malgun Gothic" pitchFamily="34" charset="-120"/>
+              </a:rPr>
+              <a:t>gpt-4.1-mini·gpt-5.4</a:t>
+            </a:r>
+            <a:endParaRPr lang="en-US" sz="1100" dirty="0"/>
+          </a:p>
+          <a:p>
+            <a:pPr indent="0" marL="0">
+              <a:lnSpc>
+                <a:spcPct val="105000"/>
+              </a:lnSpc>
+              <a:buNone/>
+            </a:pPr>
+            <a:r>
+              <a:rPr lang="en-US" sz="1100" i="1" dirty="0">
+                <a:solidFill>
+                  <a:srgbClr val="9FC7C4"/>
+                </a:solidFill>
+                <a:latin typeface="Malgun Gothic" pitchFamily="34" charset="0"/>
+                <a:ea typeface="Malgun Gothic" pitchFamily="34" charset="-122"/>
+                <a:cs typeface="Malgun Gothic" pitchFamily="34" charset="-120"/>
+              </a:rPr>
+              <a:t>→ 세션 내 기억만 동작 · 세션 간 영구기억(장기 메모리)은 설계만</a:t>
+            </a:r>
+            <a:endParaRPr lang="en-US" sz="1100" dirty="0"/>
           </a:p>
         </p:txBody>
       </p:sp>
@@ -15427,7 +18259,7 @@
                 <a:ea typeface="Malgun Gothic" pitchFamily="34" charset="-122"/>
                 <a:cs typeface="Malgun Gothic" pitchFamily="34" charset="-120"/>
               </a:rPr>
-              <a:t>대상 작업  </a:t>
+              <a:t xml:space="preserve">대상 작업  </a:t>
             </a:r>
             <a:pPr indent="0" marL="0">
               <a:buNone/>
@@ -15441,7 +18273,7 @@
                 <a:ea typeface="Malgun Gothic" pitchFamily="34" charset="-122"/>
                 <a:cs typeface="Malgun Gothic" pitchFamily="34" charset="-120"/>
               </a:rPr>
-              <a:t>적치지시 생성 · 피킹지시 발행 · 출고확정     </a:t>
+              <a:t xml:space="preserve">적치지시 생성 · 피킹지시 발행 · 출고확정     </a:t>
             </a:r>
             <a:pPr indent="0" marL="0">
               <a:buNone/>
@@ -15455,7 +18287,7 @@
                 <a:ea typeface="Malgun Gothic" pitchFamily="34" charset="-122"/>
                 <a:cs typeface="Malgun Gothic" pitchFamily="34" charset="-120"/>
               </a:rPr>
-              <a:t>원칙  </a:t>
+              <a:t xml:space="preserve">원칙  </a:t>
             </a:r>
             <a:pPr indent="0" marL="0">
               <a:buNone/>
@@ -16241,7 +19073,7 @@
                 <a:ea typeface="Malgun Gothic" pitchFamily="34" charset="-122"/>
                 <a:cs typeface="Malgun Gothic" pitchFamily="34" charset="-120"/>
               </a:rPr>
-              <a:t>LLM · 임베딩  </a:t>
+              <a:t xml:space="preserve">LLM · 임베딩  </a:t>
             </a:r>
             <a:pPr indent="0" marL="0">
               <a:buNone/>
@@ -16314,7 +19146,7 @@
                 <a:ea typeface="Malgun Gothic" pitchFamily="34" charset="-122"/>
                 <a:cs typeface="Malgun Gothic" pitchFamily="34" charset="-120"/>
               </a:rPr>
-              <a:t>LangGraph  </a:t>
+              <a:t xml:space="preserve">LangGraph  </a:t>
             </a:r>
             <a:pPr indent="0" marL="0">
               <a:buNone/>
@@ -16387,7 +19219,7 @@
                 <a:ea typeface="Malgun Gothic" pitchFamily="34" charset="-122"/>
                 <a:cs typeface="Malgun Gothic" pitchFamily="34" charset="-120"/>
               </a:rPr>
-              <a:t>Tool Engine  </a:t>
+              <a:t xml:space="preserve">Tool Engine  </a:t>
             </a:r>
             <a:pPr indent="0" marL="0">
               <a:buNone/>
@@ -16460,7 +19292,7 @@
                 <a:ea typeface="Malgun Gothic" pitchFamily="34" charset="-122"/>
                 <a:cs typeface="Malgun Gothic" pitchFamily="34" charset="-120"/>
               </a:rPr>
-              <a:t>RAG (FAISS)  </a:t>
+              <a:t xml:space="preserve">RAG (FAISS)  </a:t>
             </a:r>
             <a:pPr indent="0" marL="0">
               <a:buNone/>
@@ -16533,7 +19365,7 @@
                 <a:ea typeface="Malgun Gothic" pitchFamily="34" charset="-122"/>
                 <a:cs typeface="Malgun Gothic" pitchFamily="34" charset="-120"/>
               </a:rPr>
-              <a:t>SQLite  </a:t>
+              <a:t xml:space="preserve">SQLite  </a:t>
             </a:r>
             <a:pPr indent="0" marL="0">
               <a:buNone/>
@@ -16606,7 +19438,7 @@
                 <a:ea typeface="Malgun Gothic" pitchFamily="34" charset="-122"/>
                 <a:cs typeface="Malgun Gothic" pitchFamily="34" charset="-120"/>
               </a:rPr>
-              <a:t>Linear Regression  </a:t>
+              <a:t xml:space="preserve">Linear Regression  </a:t>
             </a:r>
             <a:pPr indent="0" marL="0">
               <a:buNone/>
@@ -16679,7 +19511,7 @@
                 <a:ea typeface="Malgun Gothic" pitchFamily="34" charset="-122"/>
                 <a:cs typeface="Malgun Gothic" pitchFamily="34" charset="-120"/>
               </a:rPr>
-              <a:t>FastAPI · Streamlit  </a:t>
+              <a:t xml:space="preserve">FastAPI · Streamlit  </a:t>
             </a:r>
             <a:pPr indent="0" marL="0">
               <a:buNone/>
@@ -16793,7 +19625,7 @@
                 <a:ea typeface="Malgun Gothic" pitchFamily="34" charset="-122"/>
                 <a:cs typeface="Malgun Gothic" pitchFamily="34" charset="-120"/>
               </a:rPr>
-              <a:t>적치 정책   </a:t>
+              <a:t xml:space="preserve">적치 정책   </a:t>
             </a:r>
             <a:pPr indent="0" marL="0">
               <a:buNone/>
@@ -16846,7 +19678,7 @@
                 <a:ea typeface="Malgun Gothic" pitchFamily="34" charset="-122"/>
                 <a:cs typeface="Malgun Gothic" pitchFamily="34" charset="-120"/>
               </a:rPr>
-              <a:t>피킹 정책   </a:t>
+              <a:t xml:space="preserve">피킹 정책   </a:t>
             </a:r>
             <a:pPr indent="0" marL="0">
               <a:buNone/>
@@ -16899,7 +19731,7 @@
                 <a:ea typeface="Malgun Gothic" pitchFamily="34" charset="-122"/>
                 <a:cs typeface="Malgun Gothic" pitchFamily="34" charset="-120"/>
               </a:rPr>
-              <a:t>재고 리스크 정책   </a:t>
+              <a:t xml:space="preserve">재고 리스크 정책   </a:t>
             </a:r>
             <a:pPr indent="0" marL="0">
               <a:buNone/>
@@ -16952,7 +19784,7 @@
                 <a:ea typeface="Malgun Gothic" pitchFamily="34" charset="-122"/>
                 <a:cs typeface="Malgun Gothic" pitchFamily="34" charset="-120"/>
               </a:rPr>
-              <a:t>운영 SOP   </a:t>
+              <a:t xml:space="preserve">운영 SOP   </a:t>
             </a:r>
             <a:pPr indent="0" marL="0">
               <a:buNone/>
@@ -17005,7 +19837,7 @@
                 <a:ea typeface="Malgun Gothic" pitchFamily="34" charset="-122"/>
                 <a:cs typeface="Malgun Gothic" pitchFamily="34" charset="-120"/>
               </a:rPr>
-              <a:t>산식 문서   </a:t>
+              <a:t xml:space="preserve">산식 문서   </a:t>
             </a:r>
             <a:pPr indent="0" marL="0">
               <a:buNone/>
@@ -17058,7 +19890,7 @@
                 <a:ea typeface="Malgun Gothic" pitchFamily="34" charset="-122"/>
                 <a:cs typeface="Malgun Gothic" pitchFamily="34" charset="-120"/>
               </a:rPr>
-              <a:t>용어 사전   </a:t>
+              <a:t xml:space="preserve">용어 사전   </a:t>
             </a:r>
             <a:pPr indent="0" marL="0">
               <a:buNone/>

--- a/Smart_WMS_Agent_기획요약.pptx
+++ b/Smart_WMS_Agent_기획요약.pptx
@@ -2994,7 +2994,7 @@
                 <a:ea typeface="Malgun Gothic" pitchFamily="34" charset="-122"/>
                 <a:cs typeface="Malgun Gothic" pitchFamily="34" charset="-120"/>
               </a:rPr>
-              <a:t>Smart WMS Agent</a:t>
+              <a:t>WOONG AI</a:t>
             </a:r>
             <a:endParaRPr lang="en-US" sz="4800" dirty="0"/>
           </a:p>
@@ -3752,7 +3752,7 @@
                 <a:ea typeface="Malgun Gothic" pitchFamily="34" charset="-122"/>
                 <a:cs typeface="Malgun Gothic" pitchFamily="34" charset="-120"/>
               </a:rPr>
-              <a:t>Smart WMS Agent</a:t>
+              <a:t>WOONG AI</a:t>
             </a:r>
             <a:endParaRPr lang="en-US" sz="1100" dirty="0"/>
           </a:p>
@@ -13389,7 +13389,7 @@
                 <a:ea typeface="Malgun Gothic" pitchFamily="34" charset="-122"/>
                 <a:cs typeface="Malgun Gothic" pitchFamily="34" charset="-120"/>
               </a:rPr>
-              <a:t>Smart WMS Agent · Blackboard Auto-Execution Layer</a:t>
+              <a:t>WOONG AI · Blackboard Auto-Execution Layer</a:t>
             </a:r>
             <a:endParaRPr lang="en-US" sz="1100" dirty="0"/>
           </a:p>
@@ -25378,7 +25378,7 @@
                 <a:ea typeface="Malgun Gothic" pitchFamily="34" charset="-122"/>
                 <a:cs typeface="Malgun Gothic" pitchFamily="34" charset="-120"/>
               </a:rPr>
-              <a:t>Smart WMS Agent</a:t>
+              <a:t>WOONG AI</a:t>
             </a:r>
             <a:endParaRPr lang="en-US" sz="1100" dirty="0"/>
           </a:p>
